--- a/docs/06_presentations/DA-ZVAD_Phase2_Review.pptx
+++ b/docs/06_presentations/DA-ZVAD_Phase2_Review.pptx
@@ -740,7 +740,7 @@
           <a:lstStyle/>
           <a:p>
             <a:r>
-              <a:t>The most interesting slide. Point at the two prompts and let them see the shared words. Then the punchline: the more accurate the description, the more damage it does. That is why the result inverted.</a:t>
+              <a:t>This is the proof that the diagnosis was not invented after the fact. Say clearly that neither panel uses labels. The cameras are separate regions of the space and sit at different similarity levels, which is exactly why pooling raw scores destroyed the ordering.</a:t>
             </a:r>
           </a:p>
         </p:txBody>
@@ -810,7 +810,7 @@
           <a:lstStyle/>
           <a:p>
             <a:r>
-              <a:t>This is the proof that the diagnosis was not invented after the fact. Say clearly that neither panel uses labels. The cameras are separate regions of the space and sit at different similarity levels, which is exactly why pooling raw scores destroyed the ordering.</a:t>
+              <a:t>The most interesting slide. Point at the two prompts and let them see the shared words. Then the punchline: the more accurate the description, the more damage it does. That is why the result inverted.</a:t>
             </a:r>
           </a:p>
         </p:txBody>
@@ -950,7 +950,7 @@
           <a:lstStyle/>
           <a:p>
             <a:r>
-              <a:t>Be scrupulous. The +0.027 is positive at every window but sits inside the spread, so we report direction and not magnitude. The claim rests on the mismatched penalty. Understating here protects you.</a:t>
+              <a:t>The picture of the previous table. Trace the two arrows with a finger. The grey arrow points the wrong way and the orange one points the right way, and the only thing separating them is where the sentence was attached.</a:t>
             </a:r>
           </a:p>
         </p:txBody>
@@ -1020,7 +1020,7 @@
           <a:lstStyle/>
           <a:p>
             <a:r>
-              <a:t>Volunteer the surprise: we expected motion to help and it does not. The pooled embedding already registers enough of it. Reporting the prediction that failed is stronger than reporting only the ones that held.</a:t>
+              <a:t>The most persuasive slide in the deck for a sceptical panel, because there is no aggregation to argue with - two runs over identical frames with identical frozen weights. Say that the curves coincide outside the event on purpose: that is the control.</a:t>
             </a:r>
           </a:p>
         </p:txBody>
@@ -1090,7 +1090,7 @@
           <a:lstStyle/>
           <a:p>
             <a:r>
-              <a:t>The picture of the previous table. Trace the two arrows with a finger. The grey arrow points the wrong way and the orange one points the right way, and the only thing separating them is where the sentence was attached.</a:t>
+              <a:t>Be scrupulous. The +0.027 is positive at every window but sits inside the spread, so we report direction and not magnitude. The claim rests on the mismatched penalty. Understating here protects you.</a:t>
             </a:r>
           </a:p>
         </p:txBody>
@@ -1160,7 +1160,7 @@
           <a:lstStyle/>
           <a:p>
             <a:r>
-              <a:t>The most important slide in the deck. Detection transfers almost exactly; the adaptation does not. Give the honest reading - on Avenue a placeholder beats an accurate description, so that benefit cannot be domain adaptation. Then give the conjecture AND the experiment that would settle it.</a:t>
+              <a:t>Volunteer the surprise: we expected motion to help and it does not. The pooled embedding already registers enough of it. Reporting the prediction that failed is stronger than reporting only the ones that held.</a:t>
             </a:r>
           </a:p>
         </p:txBody>
@@ -1230,7 +1230,7 @@
           <a:lstStyle/>
           <a:p>
             <a:r>
-              <a:t>The most persuasive slide in the deck for a sceptical panel, because there is no aggregation to argue with - two runs over identical frames with identical frozen weights. Say that the curves coincide outside the event on purpose: that is the control.</a:t>
+              <a:t>Volunteer the weakness before anyone asks. The error bars overlap, so the top three are statistically tied. The claim is that nothing we added beat plain language, which is a negative result about our own elaborations, not a win over the alternatives.</a:t>
             </a:r>
           </a:p>
         </p:txBody>
@@ -1370,7 +1370,7 @@
           <a:lstStyle/>
           <a:p>
             <a:r>
-              <a:t>This is the slide that shows a full cycle: we saw something odd, formed an explanation, designed a test that could have killed it, ran it, and it held. Say out loud that a gap near +0.105 here would have refuted us. Then give the caveat yourself - three of nine views are negative, so within one scene the effect is not reliable.</a:t>
+              <a:t>The most important slide in the deck. Detection transfers almost exactly; the adaptation does not. Give the honest reading - on Avenue a placeholder beats an accurate description, so that benefit cannot be domain adaptation. Then give the conjecture AND the experiment that would settle it.</a:t>
             </a:r>
           </a:p>
         </p:txBody>
@@ -1440,7 +1440,7 @@
           <a:lstStyle/>
           <a:p>
             <a:r>
-              <a:t>Say why you are showing failures: the claim is that the minimal configuration is right, and that is only credible next to what was tried. If the panel suspects generated work, this slide is your best answer.</a:t>
+              <a:t>This is the slide that shows a full cycle: we saw something odd, formed an explanation, designed a test that could have killed it, ran it, and it held. Say out loud that a gap near +0.105 here would have refuted us. Then give the caveat yourself - three of nine views are negative, so within one scene the effect is not reliable.</a:t>
             </a:r>
           </a:p>
         </p:txBody>
@@ -1510,7 +1510,7 @@
           <a:lstStyle/>
           <a:p>
             <a:r>
-              <a:t>Anchor on the trained baseline, not on LAVAD. You match the benchmark's own 2018 baseline using none of its training data. Then concede LAVAD openly.</a:t>
+              <a:t>Show the spread yourself. Three views are negative and two nearly reach the pooled figure, so the result is a shift in the mean rather than a collapse everywhere. Saying this before the panel spots it is the difference between a caveat and a hole.</a:t>
             </a:r>
           </a:p>
         </p:txBody>
@@ -1580,7 +1580,7 @@
           <a:lstStyle/>
           <a:p>
             <a:r>
-              <a:t>Volunteer the weakness before anyone asks. The error bars overlap, so the top three are statistically tied. The claim is that nothing we added beat plain language, which is a negative result about our own elaborations, not a win over the alternatives.</a:t>
+              <a:t>Say why you are showing failures: the claim is that the minimal configuration is right, and that is only credible next to what was tried. If the panel suspects generated work, this slide is your best answer.</a:t>
             </a:r>
           </a:p>
         </p:txBody>
@@ -1650,7 +1650,7 @@
           <a:lstStyle/>
           <a:p>
             <a:r>
-              <a:t>Deliver these confidently rather than apologetically. The metric limitation is worth dwelling on - it is a real methodological point about a protocol the whole field uses, and we found it by chasing our own bug.</a:t>
+              <a:t>Anchor on the trained baseline, not on LAVAD. You match the benchmark's own 2018 baseline using none of its training data. Then concede LAVAD openly.</a:t>
             </a:r>
           </a:p>
         </p:txBody>
@@ -1720,7 +1720,7 @@
           <a:lstStyle/>
           <a:p>
             <a:r>
-              <a:t>Priority one is the within-view control because it turns our explanation from a conjecture into a result. Note the infrastructure cost is now paid.</a:t>
+              <a:t>Deliver these confidently rather than apologetically. The metric limitation is worth dwelling on - it is a real methodological point about a protocol the whole field uses, and we found it by chasing our own bug.</a:t>
             </a:r>
           </a:p>
         </p:txBody>
@@ -1790,7 +1790,7 @@
           <a:lstStyle/>
           <a:p>
             <a:r>
-              <a:t>Close on the boundary, not the number. The claim is scoped rather than abandoned, and we named the experiment that settles it. Then hand over.</a:t>
+              <a:t>Priority one is the within-view control because it turns our explanation from a conjecture into a result. Note the infrastructure cost is now paid.</a:t>
             </a:r>
           </a:p>
         </p:txBody>
@@ -1860,7 +1860,7 @@
           <a:lstStyle/>
           <a:p>
             <a:r>
-              <a:t>Show the spread yourself. Three views are negative and two nearly reach the pooled figure, so the result is a shift in the mean rather than a collapse everywhere. Saying this before the panel spots it is the difference between a caveat and a hole.</a:t>
+              <a:t>Close on the boundary, not the number. The claim is scoped rather than abandoned, and we named the experiment that settles it. Then hand over.</a:t>
             </a:r>
           </a:p>
         </p:txBody>
@@ -1930,7 +1930,7 @@
           <a:lstStyle/>
           <a:p>
             <a:r>
-              <a:t>Also not read aloud. If asked how the work is positioned, this slide is the answer: the frozen models are all off-the-shelf, the benchmarks and metrics are the standard ones, and every method we compare against is here.</a:t>
+              <a:t>Do not read these out. They are here because they are the evidence base for the gap: the six surveys are what let us say the field scopes concept shift out. Be ready to say which one contains the quote - it is Liu et al. 2022.</a:t>
             </a:r>
           </a:p>
         </p:txBody>
@@ -2000,7 +2000,7 @@
           <a:lstStyle/>
           <a:p>
             <a:r>
-              <a:t>Do not read these out. They are here because they are the evidence base for the gap: the six surveys are what let us say the field scopes concept shift out. Be ready to say which one contains the quote - it is Liu et al. 2022.</a:t>
+              <a:t>Also not read aloud. If asked how the work is positioned, this slide is the answer: the frozen models are all off-the-shelf, the benchmarks and metrics are the standard ones, and every method we compare against is here.</a:t>
             </a:r>
           </a:p>
         </p:txBody>
@@ -7181,7 +7181,7 @@
                 </a:solidFill>
                 <a:latin typeface="Segoe UI"/>
               </a:rPr>
-              <a:t>The published protocol for this benchmark normalises each clip first. We were not doing it.</a:t>
+              <a:t>The published protocol for this benchmark [21] normalises each clip first. We were not doing it.</a:t>
             </a:r>
           </a:p>
         </p:txBody>
@@ -16856,7 +16856,7 @@
                           </a:solidFill>
                           <a:latin typeface="Segoe UI"/>
                         </a:rPr>
-                        <a:t>Liu et al. 2018 — trained on the target scene</a:t>
+                        <a:t>Liu et al. 2018 [21] — trained on the target scene</a:t>
                       </a:r>
                     </a:p>
                   </a:txBody>
@@ -16927,7 +16927,7 @@
                           </a:solidFill>
                           <a:latin typeface="Segoe UI"/>
                         </a:rPr>
-                        <a:t>LAVAD (CVPR 2024), training-free</a:t>
+                        <a:t>LAVAD [7] (CVPR 2024), training-free</a:t>
                       </a:r>
                     </a:p>
                   </a:txBody>
@@ -18609,7 +18609,7 @@
                           </a:solidFill>
                           <a:latin typeface="Segoe UI"/>
                         </a:rPr>
-                        <a:t>Context sweep on MVTec AD</a:t>
+                        <a:t>Context sweep on MVTec AD [5]</a:t>
                       </a:r>
                     </a:p>
                   </a:txBody>
@@ -19334,7 +19334,7 @@
                 </a:solidFill>
                 <a:latin typeface="Segoe UI"/>
               </a:rPr>
-              <a:t>Domain adaptation research targets covariate shift by explicit scoping. Anomaly detection is dominated by concept shift.</a:t>
+              <a:t>Domain adaptation research targets covariate shift by explicit scoping [14, 15]. Anomaly detection is dominated by concept shift.</a:t>
             </a:r>
           </a:p>
         </p:txBody>
@@ -20118,7 +20118,7 @@
                 </a:solidFill>
                 <a:latin typeface="Segoe UI"/>
               </a:rPr>
-              <a:t>1 OF 2  ·  THE DOMAIN-ADAPTATION LITERATURE</a:t>
+              <a:t>1 OF 2</a:t>
             </a:r>
           </a:p>
         </p:txBody>
@@ -20253,8 +20253,8 @@
         </p:nvSpPr>
         <p:spPr>
           <a:xfrm>
-            <a:off x="777240" y="1810512"/>
-            <a:ext cx="5090007" cy="237744"/>
+            <a:off x="777240" y="1755648"/>
+            <a:ext cx="10637215" cy="274320"/>
           </a:xfrm>
           <a:prstGeom prst="rect">
             <a:avLst/>
@@ -20267,19 +20267,28 @@
           </a:bodyPr>
           <a:lstStyle/>
           <a:p>
-            <a:pPr algn="l">
+            <a:pPr>
               <a:lnSpc>
-                <a:spcPct val="100000"/>
+                <a:spcPct val="102000"/>
               </a:lnSpc>
             </a:pPr>
             <a:r>
-              <a:rPr sz="1000" b="1" i="0">
-                <a:solidFill>
-                  <a:srgbClr val="0D6B67"/>
-                </a:solidFill>
-                <a:latin typeface="Segoe UI"/>
-              </a:rPr>
-              <a:t>THE SIX SURVEYS THE RESEARCH GAP IS ARGUED FROM</a:t>
+              <a:rPr sz="900" b="1">
+                <a:solidFill>
+                  <a:srgbClr val="141C1E"/>
+                </a:solidFill>
+                <a:latin typeface="Segoe UI"/>
+              </a:rPr>
+              <a:t>[1]  </a:t>
+            </a:r>
+            <a:r>
+              <a:rPr sz="900">
+                <a:solidFill>
+                  <a:srgbClr val="141C1E"/>
+                </a:solidFill>
+                <a:latin typeface="Segoe UI"/>
+              </a:rPr>
+              <a:t>K. Wilkinghoff, N. Madan, J. M. Valverde, K. Nasrollahi, R. T. Ionescu, R. Wisniewski, T. B. Moeslund, W. Wang, Z.-H. Tan, Out of context: Reliability in multimodal anomaly detection requires contextual inference, arXiv preprint arXiv:2604.13252 (2026).</a:t>
             </a:r>
           </a:p>
         </p:txBody>
@@ -20292,8 +20301,8 @@
         </p:nvSpPr>
         <p:spPr>
           <a:xfrm>
-            <a:off x="777240" y="2121408"/>
-            <a:ext cx="5090007" cy="384048"/>
+            <a:off x="777240" y="2061972"/>
+            <a:ext cx="10637215" cy="274320"/>
           </a:xfrm>
           <a:prstGeom prst="rect">
             <a:avLst/>
@@ -20308,26 +20317,26 @@
           <a:p>
             <a:pPr>
               <a:lnSpc>
-                <a:spcPct val="110000"/>
+                <a:spcPct val="102000"/>
               </a:lnSpc>
             </a:pPr>
             <a:r>
-              <a:rPr sz="1000" b="1">
+              <a:rPr sz="900" b="1">
                 <a:solidFill>
                   <a:srgbClr val="141C1E"/>
                 </a:solidFill>
                 <a:latin typeface="Segoe UI"/>
               </a:rPr>
-              <a:t>Liu et al.  </a:t>
-            </a:r>
-            <a:r>
-              <a:rPr sz="1000">
-                <a:solidFill>
-                  <a:srgbClr val="617274"/>
-                </a:solidFill>
-                <a:latin typeface="Segoe UI"/>
-              </a:rPr>
-              <a:t>Deep unsupervised domain adaptation. APSIPA 2022. — the concept-shift quotation.</a:t>
+              <a:t>[2]  </a:t>
+            </a:r>
+            <a:r>
+              <a:rPr sz="900">
+                <a:solidFill>
+                  <a:srgbClr val="141C1E"/>
+                </a:solidFill>
+                <a:latin typeface="Segoe UI"/>
+              </a:rPr>
+              <a:t>A. Radford, J. W. Kim, C. Hallacy, A. Ramesh, G. Goh, S. Agarwal, G. Sastry, A. Askell, P. Mishkin, J. Clark, G. Krueger, I. Sutskever, Learning transferable visual models from natural language supervision, in: Proc. Int. Conf. Mach. Learn. (ICML), 2021, pp. 8748–8763.</a:t>
             </a:r>
           </a:p>
         </p:txBody>
@@ -20340,8 +20349,8 @@
         </p:nvSpPr>
         <p:spPr>
           <a:xfrm>
-            <a:off x="777240" y="2523744"/>
-            <a:ext cx="5090007" cy="384048"/>
+            <a:off x="777240" y="2368296"/>
+            <a:ext cx="10637215" cy="274320"/>
           </a:xfrm>
           <a:prstGeom prst="rect">
             <a:avLst/>
@@ -20356,26 +20365,26 @@
           <a:p>
             <a:pPr>
               <a:lnSpc>
-                <a:spcPct val="110000"/>
+                <a:spcPct val="102000"/>
               </a:lnSpc>
             </a:pPr>
             <a:r>
-              <a:rPr sz="1000" b="1">
+              <a:rPr sz="900" b="1">
                 <a:solidFill>
                   <a:srgbClr val="141C1E"/>
                 </a:solidFill>
                 <a:latin typeface="Segoe UI"/>
               </a:rPr>
-              <a:t>Wang &amp; Deng  </a:t>
-            </a:r>
-            <a:r>
-              <a:rPr sz="1000">
-                <a:solidFill>
-                  <a:srgbClr val="617274"/>
-                </a:solidFill>
-                <a:latin typeface="Segoe UI"/>
-              </a:rPr>
-              <a:t>Deep visual domain adaptation: a survey. Neurocomputing 2018.</a:t>
+              <a:t>[3]  </a:t>
+            </a:r>
+            <a:r>
+              <a:rPr sz="900">
+                <a:solidFill>
+                  <a:srgbClr val="141C1E"/>
+                </a:solidFill>
+                <a:latin typeface="Segoe UI"/>
+              </a:rPr>
+              <a:t>J. Jeong, Y. Zou, T. Kim, D. Zhang, A. Ravichandran, O. Dabeer, WinCLIP: Zero-/few-shot anomaly classification and segmentation, in: Proc. IEEE/CVF Conf. Comput. Vis. Pattern Recognit. (CVPR), 2023, pp. 19606–19616.</a:t>
             </a:r>
           </a:p>
         </p:txBody>
@@ -20388,8 +20397,8 @@
         </p:nvSpPr>
         <p:spPr>
           <a:xfrm>
-            <a:off x="777240" y="2926079"/>
-            <a:ext cx="5090007" cy="384048"/>
+            <a:off x="777240" y="2674620"/>
+            <a:ext cx="10637215" cy="274320"/>
           </a:xfrm>
           <a:prstGeom prst="rect">
             <a:avLst/>
@@ -20404,26 +20413,26 @@
           <a:p>
             <a:pPr>
               <a:lnSpc>
-                <a:spcPct val="110000"/>
+                <a:spcPct val="102000"/>
               </a:lnSpc>
             </a:pPr>
             <a:r>
-              <a:rPr sz="1000" b="1">
+              <a:rPr sz="900" b="1">
                 <a:solidFill>
                   <a:srgbClr val="141C1E"/>
                 </a:solidFill>
                 <a:latin typeface="Segoe UI"/>
               </a:rPr>
-              <a:t>Wilson &amp; Cook  </a:t>
-            </a:r>
-            <a:r>
-              <a:rPr sz="1000">
-                <a:solidFill>
-                  <a:srgbClr val="617274"/>
-                </a:solidFill>
-                <a:latin typeface="Segoe UI"/>
-              </a:rPr>
-              <a:t>A survey of unsupervised deep domain adaptation. ACM Comput. Surv. 2020.</a:t>
+              <a:t>[4]  </a:t>
+            </a:r>
+            <a:r>
+              <a:rPr sz="900">
+                <a:solidFill>
+                  <a:srgbClr val="141C1E"/>
+                </a:solidFill>
+                <a:latin typeface="Segoe UI"/>
+              </a:rPr>
+              <a:t>Q. Zhou, G. Pang, Y. Tian, S. He, J. Chen, AnomalyCLIP: Object-agnostic prompt learning for zero-shot anomaly detection, in: Proc. Int. Conf. Learn. Represent. (ICLR), 2024.</a:t>
             </a:r>
           </a:p>
         </p:txBody>
@@ -20436,8 +20445,8 @@
         </p:nvSpPr>
         <p:spPr>
           <a:xfrm>
-            <a:off x="777240" y="3328415"/>
-            <a:ext cx="5090007" cy="384048"/>
+            <a:off x="777240" y="2980944"/>
+            <a:ext cx="10637215" cy="274320"/>
           </a:xfrm>
           <a:prstGeom prst="rect">
             <a:avLst/>
@@ -20452,26 +20461,26 @@
           <a:p>
             <a:pPr>
               <a:lnSpc>
-                <a:spcPct val="110000"/>
+                <a:spcPct val="102000"/>
               </a:lnSpc>
             </a:pPr>
             <a:r>
-              <a:rPr sz="1000" b="1">
+              <a:rPr sz="900" b="1">
                 <a:solidFill>
                   <a:srgbClr val="141C1E"/>
                 </a:solidFill>
                 <a:latin typeface="Segoe UI"/>
               </a:rPr>
-              <a:t>Singhal et al.  </a:t>
-            </a:r>
-            <a:r>
-              <a:rPr sz="1000">
-                <a:solidFill>
-                  <a:srgbClr val="617274"/>
-                </a:solidFill>
-                <a:latin typeface="Segoe UI"/>
-              </a:rPr>
-              <a:t>Domain adaptation: challenges, methods, datasets. IEEE Access 2023.</a:t>
+              <a:t>[5]  </a:t>
+            </a:r>
+            <a:r>
+              <a:rPr sz="900">
+                <a:solidFill>
+                  <a:srgbClr val="141C1E"/>
+                </a:solidFill>
+                <a:latin typeface="Segoe UI"/>
+              </a:rPr>
+              <a:t>P. Bergmann, M. Fauser, D. Sattlegger, C. Steger, MVTec AD — A comprehensive real-world dataset for unsupervised anomaly detection, in: Proc. IEEE/CVF Conf. Comput. Vis. Pattern Recognit. (CVPR), 2019, pp. 9592–9600.</a:t>
             </a:r>
           </a:p>
         </p:txBody>
@@ -20484,8 +20493,8 @@
         </p:nvSpPr>
         <p:spPr>
           <a:xfrm>
-            <a:off x="777240" y="3730752"/>
-            <a:ext cx="5090007" cy="384048"/>
+            <a:off x="777240" y="3287268"/>
+            <a:ext cx="10637215" cy="274320"/>
           </a:xfrm>
           <a:prstGeom prst="rect">
             <a:avLst/>
@@ -20500,26 +20509,26 @@
           <a:p>
             <a:pPr>
               <a:lnSpc>
-                <a:spcPct val="110000"/>
+                <a:spcPct val="102000"/>
               </a:lnSpc>
             </a:pPr>
             <a:r>
-              <a:rPr sz="1000" b="1">
+              <a:rPr sz="900" b="1">
                 <a:solidFill>
                   <a:srgbClr val="141C1E"/>
                 </a:solidFill>
                 <a:latin typeface="Segoe UI"/>
               </a:rPr>
-              <a:t>Patel et al.  </a:t>
-            </a:r>
-            <a:r>
-              <a:rPr sz="1000">
-                <a:solidFill>
-                  <a:srgbClr val="617274"/>
-                </a:solidFill>
-                <a:latin typeface="Segoe UI"/>
-              </a:rPr>
-              <a:t>Visual domain adaptation. IEEE Signal Process. Mag. 2015.</a:t>
+              <a:t>[6]  </a:t>
+            </a:r>
+            <a:r>
+              <a:rPr sz="900">
+                <a:solidFill>
+                  <a:srgbClr val="141C1E"/>
+                </a:solidFill>
+                <a:latin typeface="Segoe UI"/>
+              </a:rPr>
+              <a:t>K. Roth, L. Pemula, J. Zepeda, B. Schölkopf, T. Brox, P. Gehler, Towards total recall in industrial anomaly detection, in: Proc. IEEE/CVF Conf. Comput. Vis. Pattern Recognit. (CVPR), 2022, pp. 14318–14328.</a:t>
             </a:r>
           </a:p>
         </p:txBody>
@@ -20532,8 +20541,8 @@
         </p:nvSpPr>
         <p:spPr>
           <a:xfrm>
-            <a:off x="777240" y="4133088"/>
-            <a:ext cx="5090007" cy="384048"/>
+            <a:off x="777240" y="3593591"/>
+            <a:ext cx="10637215" cy="274320"/>
           </a:xfrm>
           <a:prstGeom prst="rect">
             <a:avLst/>
@@ -20548,26 +20557,26 @@
           <a:p>
             <a:pPr>
               <a:lnSpc>
-                <a:spcPct val="110000"/>
+                <a:spcPct val="102000"/>
               </a:lnSpc>
             </a:pPr>
             <a:r>
-              <a:rPr sz="1000" b="1">
+              <a:rPr sz="900" b="1">
                 <a:solidFill>
                   <a:srgbClr val="141C1E"/>
                 </a:solidFill>
                 <a:latin typeface="Segoe UI"/>
               </a:rPr>
-              <a:t>Kouw &amp; Loog  </a:t>
-            </a:r>
-            <a:r>
-              <a:rPr sz="1000">
-                <a:solidFill>
-                  <a:srgbClr val="617274"/>
-                </a:solidFill>
-                <a:latin typeface="Segoe UI"/>
-              </a:rPr>
-              <a:t>An introduction to domain adaptation and transfer learning. arXiv 2018.</a:t>
+              <a:t>[7]  </a:t>
+            </a:r>
+            <a:r>
+              <a:rPr sz="900">
+                <a:solidFill>
+                  <a:srgbClr val="141C1E"/>
+                </a:solidFill>
+                <a:latin typeface="Segoe UI"/>
+              </a:rPr>
+              <a:t>L. Zanella, W. Menapace, M. Mancini, Y. Wang, E. Ricci, Harnessing large language models for training-free video anomaly detection, in: Proc. IEEE/CVF Conf. Comput. Vis. Pattern Recognit. (CVPR), 2024, pp. 18527–18536.</a:t>
             </a:r>
           </a:p>
         </p:txBody>
@@ -20580,8 +20589,8 @@
         </p:nvSpPr>
         <p:spPr>
           <a:xfrm>
-            <a:off x="777240" y="4535424"/>
-            <a:ext cx="5090007" cy="384048"/>
+            <a:off x="777240" y="3899915"/>
+            <a:ext cx="10637215" cy="274320"/>
           </a:xfrm>
           <a:prstGeom prst="rect">
             <a:avLst/>
@@ -20596,26 +20605,26 @@
           <a:p>
             <a:pPr>
               <a:lnSpc>
-                <a:spcPct val="110000"/>
+                <a:spcPct val="102000"/>
               </a:lnSpc>
             </a:pPr>
             <a:r>
-              <a:rPr sz="1000" b="1">
+              <a:rPr sz="900" b="1">
                 <a:solidFill>
                   <a:srgbClr val="141C1E"/>
                 </a:solidFill>
                 <a:latin typeface="Segoe UI"/>
               </a:rPr>
-              <a:t>Fan et al.  </a:t>
-            </a:r>
-            <a:r>
-              <a:rPr sz="1000">
-                <a:solidFill>
-                  <a:srgbClr val="617274"/>
-                </a:solidFill>
-                <a:latin typeface="Segoe UI"/>
-              </a:rPr>
-              <a:t>LLM adaptation strategies. Solid Earth Sci. 2026.</a:t>
+              <a:t>[8]  </a:t>
+            </a:r>
+            <a:r>
+              <a:rPr sz="900">
+                <a:solidFill>
+                  <a:srgbClr val="141C1E"/>
+                </a:solidFill>
+                <a:latin typeface="Segoe UI"/>
+              </a:rPr>
+              <a:t>M. Ye, W. Liu, P. He, VERA: Explainable video anomaly detection via verbalized learning of vision-language models, in: Proc. IEEE/CVF Conf. Comput. Vis. Pattern Recognit. (CVPR), 2025. ArXiv:2412.01095.</a:t>
             </a:r>
           </a:p>
         </p:txBody>
@@ -20628,8 +20637,8 @@
         </p:nvSpPr>
         <p:spPr>
           <a:xfrm>
-            <a:off x="6324447" y="1810512"/>
-            <a:ext cx="5090007" cy="237744"/>
+            <a:off x="777240" y="4206240"/>
+            <a:ext cx="10637215" cy="274320"/>
           </a:xfrm>
           <a:prstGeom prst="rect">
             <a:avLst/>
@@ -20642,19 +20651,28 @@
           </a:bodyPr>
           <a:lstStyle/>
           <a:p>
-            <a:pPr algn="l">
+            <a:pPr>
               <a:lnSpc>
-                <a:spcPct val="100000"/>
+                <a:spcPct val="102000"/>
               </a:lnSpc>
             </a:pPr>
             <a:r>
-              <a:rPr sz="1000" b="1" i="0">
-                <a:solidFill>
-                  <a:srgbClr val="0D6B67"/>
-                </a:solidFill>
-                <a:latin typeface="Segoe UI"/>
-              </a:rPr>
-              <a:t>DOMAIN ADAPTATION INSIDE VIDEO ANOMALY DETECTION</a:t>
+              <a:rPr sz="900" b="1">
+                <a:solidFill>
+                  <a:srgbClr val="141C1E"/>
+                </a:solidFill>
+                <a:latin typeface="Segoe UI"/>
+              </a:rPr>
+              <a:t>[9]  </a:t>
+            </a:r>
+            <a:r>
+              <a:rPr sz="900">
+                <a:solidFill>
+                  <a:srgbClr val="141C1E"/>
+                </a:solidFill>
+                <a:latin typeface="Segoe UI"/>
+              </a:rPr>
+              <a:t>S. Ahn, Y. Jo, K. Lee, S. Kwon, I. Hong, S. Park, AnyAnomaly: Zero-shot customizable video anomaly detection with LVLM, arXiv preprint arXiv:2503.04504 (2025).</a:t>
             </a:r>
           </a:p>
         </p:txBody>
@@ -20667,8 +20685,8 @@
         </p:nvSpPr>
         <p:spPr>
           <a:xfrm>
-            <a:off x="6324447" y="2121408"/>
-            <a:ext cx="5090007" cy="384048"/>
+            <a:off x="777240" y="4512564"/>
+            <a:ext cx="10637215" cy="274320"/>
           </a:xfrm>
           <a:prstGeom prst="rect">
             <a:avLst/>
@@ -20683,26 +20701,26 @@
           <a:p>
             <a:pPr>
               <a:lnSpc>
-                <a:spcPct val="110000"/>
+                <a:spcPct val="102000"/>
               </a:lnSpc>
             </a:pPr>
             <a:r>
-              <a:rPr sz="1000" b="1">
+              <a:rPr sz="900" b="1">
                 <a:solidFill>
                   <a:srgbClr val="141C1E"/>
                 </a:solidFill>
                 <a:latin typeface="Segoe UI"/>
               </a:rPr>
-              <a:t>Guo et al.  </a:t>
-            </a:r>
-            <a:r>
-              <a:rPr sz="1000">
-                <a:solidFill>
-                  <a:srgbClr val="617274"/>
-                </a:solidFill>
-                <a:latin typeface="Segoe UI"/>
-              </a:rPr>
-              <a:t>Ada-VAD: domain adaptable VAD. SDM 2024.</a:t>
+              <a:t>[10]  </a:t>
+            </a:r>
+            <a:r>
+              <a:rPr sz="900">
+                <a:solidFill>
+                  <a:srgbClr val="141C1E"/>
+                </a:solidFill>
+                <a:latin typeface="Segoe UI"/>
+              </a:rPr>
+              <a:t>P. Wu, X. Zhou, G. Pang, Y. Sun, J. Liu, P. Wang, Y. Zhang, Open-vocabulary video anomaly detection, in: Proc. IEEE/CVF Conf. Comput. Vis. Pattern Recognit. (CVPR), 2024, pp. 18297–18307.</a:t>
             </a:r>
           </a:p>
         </p:txBody>
@@ -20715,8 +20733,8 @@
         </p:nvSpPr>
         <p:spPr>
           <a:xfrm>
-            <a:off x="6324447" y="2523744"/>
-            <a:ext cx="5090007" cy="384048"/>
+            <a:off x="777240" y="4818888"/>
+            <a:ext cx="10637215" cy="274320"/>
           </a:xfrm>
           <a:prstGeom prst="rect">
             <a:avLst/>
@@ -20731,26 +20749,26 @@
           <a:p>
             <a:pPr>
               <a:lnSpc>
-                <a:spcPct val="110000"/>
+                <a:spcPct val="102000"/>
               </a:lnSpc>
             </a:pPr>
             <a:r>
-              <a:rPr sz="1000" b="1">
+              <a:rPr sz="900" b="1">
                 <a:solidFill>
                   <a:srgbClr val="141C1E"/>
                 </a:solidFill>
                 <a:latin typeface="Segoe UI"/>
               </a:rPr>
-              <a:t>Aich et al.  </a:t>
-            </a:r>
-            <a:r>
-              <a:rPr sz="1000">
-                <a:solidFill>
-                  <a:srgbClr val="617274"/>
-                </a:solidFill>
-                <a:latin typeface="Segoe UI"/>
-              </a:rPr>
-              <a:t>zxVAD: cross-domain VAD without target adaptation. WACV 2023.</a:t>
+              <a:t>[11]  </a:t>
+            </a:r>
+            <a:r>
+              <a:rPr sz="900">
+                <a:solidFill>
+                  <a:srgbClr val="141C1E"/>
+                </a:solidFill>
+                <a:latin typeface="Segoe UI"/>
+              </a:rPr>
+              <a:t>V. M. Patel, R. Gopalan, R. Li, R. Chellappa, Visual domain adaptation: A survey of recent advances, IEEE Signal Process. Mag. 32 (2015) 53–69.</a:t>
             </a:r>
           </a:p>
         </p:txBody>
@@ -20763,8 +20781,8 @@
         </p:nvSpPr>
         <p:spPr>
           <a:xfrm>
-            <a:off x="6324447" y="2926079"/>
-            <a:ext cx="5090007" cy="384048"/>
+            <a:off x="777240" y="5125212"/>
+            <a:ext cx="10637215" cy="274320"/>
           </a:xfrm>
           <a:prstGeom prst="rect">
             <a:avLst/>
@@ -20779,26 +20797,26 @@
           <a:p>
             <a:pPr>
               <a:lnSpc>
-                <a:spcPct val="110000"/>
+                <a:spcPct val="102000"/>
               </a:lnSpc>
             </a:pPr>
             <a:r>
-              <a:rPr sz="1000" b="1">
+              <a:rPr sz="900" b="1">
                 <a:solidFill>
                   <a:srgbClr val="141C1E"/>
                 </a:solidFill>
                 <a:latin typeface="Segoe UI"/>
               </a:rPr>
-              <a:t>Lu et al.  </a:t>
-            </a:r>
-            <a:r>
-              <a:rPr sz="1000">
-                <a:solidFill>
-                  <a:srgbClr val="617274"/>
-                </a:solidFill>
-                <a:latin typeface="Segoe UI"/>
-              </a:rPr>
-              <a:t>Few-shot scene-adaptive anomaly detection. ECCV 2020.</a:t>
+              <a:t>[12]  </a:t>
+            </a:r>
+            <a:r>
+              <a:rPr sz="900">
+                <a:solidFill>
+                  <a:srgbClr val="141C1E"/>
+                </a:solidFill>
+                <a:latin typeface="Segoe UI"/>
+              </a:rPr>
+              <a:t>M. Wang, W. Deng, Deep visual domain adaptation: A survey, Neurocomputing 312 (2018) 135–153.</a:t>
             </a:r>
           </a:p>
         </p:txBody>
@@ -20811,8 +20829,8 @@
         </p:nvSpPr>
         <p:spPr>
           <a:xfrm>
-            <a:off x="6324447" y="3456432"/>
-            <a:ext cx="5090007" cy="237744"/>
+            <a:off x="777240" y="5431536"/>
+            <a:ext cx="10637215" cy="274320"/>
           </a:xfrm>
           <a:prstGeom prst="rect">
             <a:avLst/>
@@ -20825,19 +20843,28 @@
           </a:bodyPr>
           <a:lstStyle/>
           <a:p>
-            <a:pPr algn="l">
+            <a:pPr>
               <a:lnSpc>
-                <a:spcPct val="100000"/>
+                <a:spcPct val="102000"/>
               </a:lnSpc>
             </a:pPr>
             <a:r>
-              <a:rPr sz="1000" b="1" i="0">
-                <a:solidFill>
-                  <a:srgbClr val="0D6B67"/>
-                </a:solidFill>
-                <a:latin typeface="Segoe UI"/>
-              </a:rPr>
-              <a:t>CONCURRENT WORK ON THE SAME PREMISE</a:t>
+              <a:rPr sz="900" b="1">
+                <a:solidFill>
+                  <a:srgbClr val="141C1E"/>
+                </a:solidFill>
+                <a:latin typeface="Segoe UI"/>
+              </a:rPr>
+              <a:t>[13]  </a:t>
+            </a:r>
+            <a:r>
+              <a:rPr sz="900">
+                <a:solidFill>
+                  <a:srgbClr val="141C1E"/>
+                </a:solidFill>
+                <a:latin typeface="Segoe UI"/>
+              </a:rPr>
+              <a:t>G. Wilson, D. J. Cook, A survey of unsupervised deep domain adaptation, ACM Comput. Surv. 51 (2020) 1–46.</a:t>
             </a:r>
           </a:p>
         </p:txBody>
@@ -20850,8 +20877,8 @@
         </p:nvSpPr>
         <p:spPr>
           <a:xfrm>
-            <a:off x="6324447" y="3767328"/>
-            <a:ext cx="5090007" cy="384048"/>
+            <a:off x="777240" y="5737859"/>
+            <a:ext cx="10637215" cy="274320"/>
           </a:xfrm>
           <a:prstGeom prst="rect">
             <a:avLst/>
@@ -20866,26 +20893,26 @@
           <a:p>
             <a:pPr>
               <a:lnSpc>
-                <a:spcPct val="110000"/>
+                <a:spcPct val="102000"/>
               </a:lnSpc>
             </a:pPr>
             <a:r>
-              <a:rPr sz="1000" b="1">
+              <a:rPr sz="900" b="1">
                 <a:solidFill>
                   <a:srgbClr val="141C1E"/>
                 </a:solidFill>
                 <a:latin typeface="Segoe UI"/>
               </a:rPr>
-              <a:t>Wilkinghoff et al.  </a:t>
-            </a:r>
-            <a:r>
-              <a:rPr sz="1000">
-                <a:solidFill>
-                  <a:srgbClr val="617274"/>
-                </a:solidFill>
-                <a:latin typeface="Segoe UI"/>
-              </a:rPr>
-              <a:t>Context-dependent normality. arXiv 2604.13252, April 2026.</a:t>
+              <a:t>[14]  </a:t>
+            </a:r>
+            <a:r>
+              <a:rPr sz="900">
+                <a:solidFill>
+                  <a:srgbClr val="141C1E"/>
+                </a:solidFill>
+                <a:latin typeface="Segoe UI"/>
+              </a:rPr>
+              <a:t>X. Liu, C. Yoo, F. Xing, H. Oh, G. El Fakhri, J.-W. Kang, J. Woo, Deep unsupervised domain adaptation: A review of recent advances and perspectives, APSIPA Trans. Signal Inf. Process. 11 (2022). ArXiv:2208.07422.</a:t>
             </a:r>
           </a:p>
         </p:txBody>
@@ -20898,8 +20925,8 @@
         </p:nvSpPr>
         <p:spPr>
           <a:xfrm>
-            <a:off x="6324447" y="4297680"/>
-            <a:ext cx="5090007" cy="237744"/>
+            <a:off x="777240" y="6044183"/>
+            <a:ext cx="10637215" cy="274320"/>
           </a:xfrm>
           <a:prstGeom prst="rect">
             <a:avLst/>
@@ -20912,163 +20939,28 @@
           </a:bodyPr>
           <a:lstStyle/>
           <a:p>
-            <a:pPr algn="l">
+            <a:pPr>
               <a:lnSpc>
-                <a:spcPct val="100000"/>
+                <a:spcPct val="102000"/>
               </a:lnSpc>
             </a:pPr>
             <a:r>
-              <a:rPr sz="1000" b="1" i="0">
-                <a:solidFill>
-                  <a:srgbClr val="0D6B67"/>
-                </a:solidFill>
-                <a:latin typeface="Segoe UI"/>
-              </a:rPr>
-              <a:t>BENCHMARKS</a:t>
-            </a:r>
-          </a:p>
-        </p:txBody>
-      </p:sp>
-      <p:sp>
-        <p:nvSpPr>
-          <p:cNvPr id="22" name="TextBox 21"/>
-          <p:cNvSpPr txBox="1"/>
-          <p:nvPr/>
-        </p:nvSpPr>
-        <p:spPr>
-          <a:xfrm>
-            <a:off x="6324447" y="4608576"/>
-            <a:ext cx="5090007" cy="384048"/>
-          </a:xfrm>
-          <a:prstGeom prst="rect">
-            <a:avLst/>
-          </a:prstGeom>
-          <a:noFill/>
-        </p:spPr>
-        <p:txBody>
-          <a:bodyPr wrap="square" lIns="0" rIns="0" tIns="0" bIns="0">
-            <a:spAutoFit/>
-          </a:bodyPr>
-          <a:lstStyle/>
-          <a:p>
-            <a:pPr>
-              <a:lnSpc>
-                <a:spcPct val="110000"/>
-              </a:lnSpc>
-            </a:pPr>
-            <a:r>
-              <a:rPr sz="1000" b="1">
+              <a:rPr sz="900" b="1">
                 <a:solidFill>
                   <a:srgbClr val="141C1E"/>
                 </a:solidFill>
                 <a:latin typeface="Segoe UI"/>
               </a:rPr>
-              <a:t>Liu et al.  </a:t>
-            </a:r>
-            <a:r>
-              <a:rPr sz="1000">
-                <a:solidFill>
-                  <a:srgbClr val="617274"/>
-                </a:solidFill>
-                <a:latin typeface="Segoe UI"/>
-              </a:rPr>
-              <a:t>ShanghaiTech. CVPR 2018.</a:t>
-            </a:r>
-          </a:p>
-        </p:txBody>
-      </p:sp>
-      <p:sp>
-        <p:nvSpPr>
-          <p:cNvPr id="23" name="TextBox 22"/>
-          <p:cNvSpPr txBox="1"/>
-          <p:nvPr/>
-        </p:nvSpPr>
-        <p:spPr>
-          <a:xfrm>
-            <a:off x="6324447" y="5010912"/>
-            <a:ext cx="5090007" cy="384048"/>
-          </a:xfrm>
-          <a:prstGeom prst="rect">
-            <a:avLst/>
-          </a:prstGeom>
-          <a:noFill/>
-        </p:spPr>
-        <p:txBody>
-          <a:bodyPr wrap="square" lIns="0" rIns="0" tIns="0" bIns="0">
-            <a:spAutoFit/>
-          </a:bodyPr>
-          <a:lstStyle/>
-          <a:p>
-            <a:pPr>
-              <a:lnSpc>
-                <a:spcPct val="110000"/>
-              </a:lnSpc>
-            </a:pPr>
-            <a:r>
-              <a:rPr sz="1000" b="1">
+              <a:t>[15]  </a:t>
+            </a:r>
+            <a:r>
+              <a:rPr sz="900">
                 <a:solidFill>
                   <a:srgbClr val="141C1E"/>
                 </a:solidFill>
                 <a:latin typeface="Segoe UI"/>
               </a:rPr>
-              <a:t>Lu et al.  </a:t>
-            </a:r>
-            <a:r>
-              <a:rPr sz="1000">
-                <a:solidFill>
-                  <a:srgbClr val="617274"/>
-                </a:solidFill>
-                <a:latin typeface="Segoe UI"/>
-              </a:rPr>
-              <a:t>CUHK Avenue. ICCV 2013.</a:t>
-            </a:r>
-          </a:p>
-        </p:txBody>
-      </p:sp>
-      <p:sp>
-        <p:nvSpPr>
-          <p:cNvPr id="24" name="TextBox 23"/>
-          <p:cNvSpPr txBox="1"/>
-          <p:nvPr/>
-        </p:nvSpPr>
-        <p:spPr>
-          <a:xfrm>
-            <a:off x="6324447" y="5413248"/>
-            <a:ext cx="5090007" cy="384048"/>
-          </a:xfrm>
-          <a:prstGeom prst="rect">
-            <a:avLst/>
-          </a:prstGeom>
-          <a:noFill/>
-        </p:spPr>
-        <p:txBody>
-          <a:bodyPr wrap="square" lIns="0" rIns="0" tIns="0" bIns="0">
-            <a:spAutoFit/>
-          </a:bodyPr>
-          <a:lstStyle/>
-          <a:p>
-            <a:pPr>
-              <a:lnSpc>
-                <a:spcPct val="110000"/>
-              </a:lnSpc>
-            </a:pPr>
-            <a:r>
-              <a:rPr sz="1000" b="1">
-                <a:solidFill>
-                  <a:srgbClr val="141C1E"/>
-                </a:solidFill>
-                <a:latin typeface="Segoe UI"/>
-              </a:rPr>
-              <a:t>Bergmann et al.  </a:t>
-            </a:r>
-            <a:r>
-              <a:rPr sz="1000">
-                <a:solidFill>
-                  <a:srgbClr val="617274"/>
-                </a:solidFill>
-                <a:latin typeface="Segoe UI"/>
-              </a:rPr>
-              <a:t>MVTec AD. CVPR 2019.</a:t>
+              <a:t>P. Singhal, R. Walambe, S. Ramanna, K. Kotecha, Domain adaptation: Challenges, methods, datasets, and applications, IEEE Access 11 (2023) 6973–7020.</a:t>
             </a:r>
           </a:p>
         </p:txBody>
@@ -21169,7 +21061,7 @@
                 </a:solidFill>
                 <a:latin typeface="Segoe UI"/>
               </a:rPr>
-              <a:t>2 OF 2  ·  ANOMALY DETECTION, MODELS, METRICS</a:t>
+              <a:t>2 OF 2</a:t>
             </a:r>
           </a:p>
         </p:txBody>
@@ -21304,8 +21196,8 @@
         </p:nvSpPr>
         <p:spPr>
           <a:xfrm>
-            <a:off x="777240" y="1810512"/>
-            <a:ext cx="5090007" cy="237744"/>
+            <a:off x="777240" y="1755648"/>
+            <a:ext cx="10637215" cy="274320"/>
           </a:xfrm>
           <a:prstGeom prst="rect">
             <a:avLst/>
@@ -21318,19 +21210,28 @@
           </a:bodyPr>
           <a:lstStyle/>
           <a:p>
-            <a:pPr algn="l">
+            <a:pPr>
               <a:lnSpc>
-                <a:spcPct val="100000"/>
+                <a:spcPct val="102000"/>
               </a:lnSpc>
             </a:pPr>
             <a:r>
-              <a:rPr sz="1000" b="1" i="0">
-                <a:solidFill>
-                  <a:srgbClr val="0D6B67"/>
-                </a:solidFill>
-                <a:latin typeface="Segoe UI"/>
-              </a:rPr>
-              <a:t>ZERO-SHOT AND TRAINING-FREE ANOMALY DETECTION</a:t>
+              <a:rPr sz="900" b="1">
+                <a:solidFill>
+                  <a:srgbClr val="141C1E"/>
+                </a:solidFill>
+                <a:latin typeface="Segoe UI"/>
+              </a:rPr>
+              <a:t>[16]  </a:t>
+            </a:r>
+            <a:r>
+              <a:rPr sz="900">
+                <a:solidFill>
+                  <a:srgbClr val="141C1E"/>
+                </a:solidFill>
+                <a:latin typeface="Segoe UI"/>
+              </a:rPr>
+              <a:t>L. Fan, F. Liu, C. Chen, Domain adaptation of large language models for geotechnical applications, Solid Earth Sci. (2026). Art. no. 100285.</a:t>
             </a:r>
           </a:p>
         </p:txBody>
@@ -21343,8 +21244,8 @@
         </p:nvSpPr>
         <p:spPr>
           <a:xfrm>
-            <a:off x="777240" y="2121408"/>
-            <a:ext cx="5090007" cy="384048"/>
+            <a:off x="777240" y="2061972"/>
+            <a:ext cx="10637215" cy="274320"/>
           </a:xfrm>
           <a:prstGeom prst="rect">
             <a:avLst/>
@@ -21359,26 +21260,26 @@
           <a:p>
             <a:pPr>
               <a:lnSpc>
-                <a:spcPct val="110000"/>
+                <a:spcPct val="102000"/>
               </a:lnSpc>
             </a:pPr>
             <a:r>
-              <a:rPr sz="1000" b="1">
+              <a:rPr sz="900" b="1">
                 <a:solidFill>
                   <a:srgbClr val="141C1E"/>
                 </a:solidFill>
                 <a:latin typeface="Segoe UI"/>
               </a:rPr>
-              <a:t>Jeong et al.  </a:t>
-            </a:r>
-            <a:r>
-              <a:rPr sz="1000">
-                <a:solidFill>
-                  <a:srgbClr val="617274"/>
-                </a:solidFill>
-                <a:latin typeface="Segoe UI"/>
-              </a:rPr>
-              <a:t>WinCLIP: zero-/few-shot anomaly classification and segmentation. CVPR 2023.</a:t>
+              <a:t>[17]  </a:t>
+            </a:r>
+            <a:r>
+              <a:rPr sz="900">
+                <a:solidFill>
+                  <a:srgbClr val="141C1E"/>
+                </a:solidFill>
+                <a:latin typeface="Segoe UI"/>
+              </a:rPr>
+              <a:t>D. Guo, Y. Fu, S. Li, Ada-VAD: Domain adaptable video anomaly detection, in: Proc. SIAM Int. Conf. Data Min. (SDM), 2024, pp. 634–642.</a:t>
             </a:r>
           </a:p>
         </p:txBody>
@@ -21391,8 +21292,8 @@
         </p:nvSpPr>
         <p:spPr>
           <a:xfrm>
-            <a:off x="777240" y="2523744"/>
-            <a:ext cx="5090007" cy="384048"/>
+            <a:off x="777240" y="2368296"/>
+            <a:ext cx="10637215" cy="274320"/>
           </a:xfrm>
           <a:prstGeom prst="rect">
             <a:avLst/>
@@ -21407,26 +21308,26 @@
           <a:p>
             <a:pPr>
               <a:lnSpc>
-                <a:spcPct val="110000"/>
+                <a:spcPct val="102000"/>
               </a:lnSpc>
             </a:pPr>
             <a:r>
-              <a:rPr sz="1000" b="1">
+              <a:rPr sz="900" b="1">
                 <a:solidFill>
                   <a:srgbClr val="141C1E"/>
                 </a:solidFill>
                 <a:latin typeface="Segoe UI"/>
               </a:rPr>
-              <a:t>Zhou et al.  </a:t>
-            </a:r>
-            <a:r>
-              <a:rPr sz="1000">
-                <a:solidFill>
-                  <a:srgbClr val="617274"/>
-                </a:solidFill>
-                <a:latin typeface="Segoe UI"/>
-              </a:rPr>
-              <a:t>AnomalyCLIP: object-agnostic prompt learning. ICLR 2024.</a:t>
+              <a:t>[18]  </a:t>
+            </a:r>
+            <a:r>
+              <a:rPr sz="900">
+                <a:solidFill>
+                  <a:srgbClr val="141C1E"/>
+                </a:solidFill>
+                <a:latin typeface="Segoe UI"/>
+              </a:rPr>
+              <a:t>Y. Lu, F. Yu, M. K. K. Reddy, Y. Wang, Few-shot scene-adaptive anomaly detection, in: Proc. Eur. Conf. Comput. Vis. (ECCV), 2020, pp. 125–141.</a:t>
             </a:r>
           </a:p>
         </p:txBody>
@@ -21439,8 +21340,8 @@
         </p:nvSpPr>
         <p:spPr>
           <a:xfrm>
-            <a:off x="777240" y="2926079"/>
-            <a:ext cx="5090007" cy="384048"/>
+            <a:off x="777240" y="2674620"/>
+            <a:ext cx="10637215" cy="274320"/>
           </a:xfrm>
           <a:prstGeom prst="rect">
             <a:avLst/>
@@ -21455,26 +21356,26 @@
           <a:p>
             <a:pPr>
               <a:lnSpc>
-                <a:spcPct val="110000"/>
+                <a:spcPct val="102000"/>
               </a:lnSpc>
             </a:pPr>
             <a:r>
-              <a:rPr sz="1000" b="1">
+              <a:rPr sz="900" b="1">
                 <a:solidFill>
                   <a:srgbClr val="141C1E"/>
                 </a:solidFill>
                 <a:latin typeface="Segoe UI"/>
               </a:rPr>
-              <a:t>Zanella et al.  </a:t>
-            </a:r>
-            <a:r>
-              <a:rPr sz="1000">
-                <a:solidFill>
-                  <a:srgbClr val="617274"/>
-                </a:solidFill>
-                <a:latin typeface="Segoe UI"/>
-              </a:rPr>
-              <a:t>LAVAD: training-free VAD with LLMs. CVPR 2024.</a:t>
+              <a:t>[19]  </a:t>
+            </a:r>
+            <a:r>
+              <a:rPr sz="900">
+                <a:solidFill>
+                  <a:srgbClr val="141C1E"/>
+                </a:solidFill>
+                <a:latin typeface="Segoe UI"/>
+              </a:rPr>
+              <a:t>A. Aich, K.-C. Peng, A. K. Roy-Chowdhury, Cross-domain video anomaly detection without target domain adaptation, in: Proc. IEEE/CVF Winter Conf. Appl. Comput. Vis. (WACV), 2023, pp. 2578–2590.</a:t>
             </a:r>
           </a:p>
         </p:txBody>
@@ -21487,8 +21388,8 @@
         </p:nvSpPr>
         <p:spPr>
           <a:xfrm>
-            <a:off x="777240" y="3328415"/>
-            <a:ext cx="5090007" cy="384048"/>
+            <a:off x="777240" y="2980944"/>
+            <a:ext cx="10637215" cy="274320"/>
           </a:xfrm>
           <a:prstGeom prst="rect">
             <a:avLst/>
@@ -21503,26 +21404,26 @@
           <a:p>
             <a:pPr>
               <a:lnSpc>
-                <a:spcPct val="110000"/>
+                <a:spcPct val="102000"/>
               </a:lnSpc>
             </a:pPr>
             <a:r>
-              <a:rPr sz="1000" b="1">
+              <a:rPr sz="900" b="1">
                 <a:solidFill>
                   <a:srgbClr val="141C1E"/>
                 </a:solidFill>
                 <a:latin typeface="Segoe UI"/>
               </a:rPr>
-              <a:t>Ye et al.  </a:t>
-            </a:r>
-            <a:r>
-              <a:rPr sz="1000">
-                <a:solidFill>
-                  <a:srgbClr val="617274"/>
-                </a:solidFill>
-                <a:latin typeface="Segoe UI"/>
-              </a:rPr>
-              <a:t>VERA: explainable VAD via verbalised learning. CVPR 2025.</a:t>
+              <a:t>[20]  </a:t>
+            </a:r>
+            <a:r>
+              <a:rPr sz="900">
+                <a:solidFill>
+                  <a:srgbClr val="141C1E"/>
+                </a:solidFill>
+                <a:latin typeface="Segoe UI"/>
+              </a:rPr>
+              <a:t>W. M. Kouw, M. Loog, An introduction to domain adaptation and transfer learning, arXiv preprint arXiv:1812.11806 (2018).</a:t>
             </a:r>
           </a:p>
         </p:txBody>
@@ -21535,8 +21436,8 @@
         </p:nvSpPr>
         <p:spPr>
           <a:xfrm>
-            <a:off x="777240" y="3730752"/>
-            <a:ext cx="5090007" cy="384048"/>
+            <a:off x="777240" y="3287268"/>
+            <a:ext cx="10637215" cy="274320"/>
           </a:xfrm>
           <a:prstGeom prst="rect">
             <a:avLst/>
@@ -21551,26 +21452,26 @@
           <a:p>
             <a:pPr>
               <a:lnSpc>
-                <a:spcPct val="110000"/>
+                <a:spcPct val="102000"/>
               </a:lnSpc>
             </a:pPr>
             <a:r>
-              <a:rPr sz="1000" b="1">
+              <a:rPr sz="900" b="1">
                 <a:solidFill>
                   <a:srgbClr val="141C1E"/>
                 </a:solidFill>
                 <a:latin typeface="Segoe UI"/>
               </a:rPr>
-              <a:t>Wu et al.  </a:t>
-            </a:r>
-            <a:r>
-              <a:rPr sz="1000">
-                <a:solidFill>
-                  <a:srgbClr val="617274"/>
-                </a:solidFill>
-                <a:latin typeface="Segoe UI"/>
-              </a:rPr>
-              <a:t>OVVAD: open-vocabulary VAD. CVPR 2024.</a:t>
+              <a:t>[21]  </a:t>
+            </a:r>
+            <a:r>
+              <a:rPr sz="900">
+                <a:solidFill>
+                  <a:srgbClr val="141C1E"/>
+                </a:solidFill>
+                <a:latin typeface="Segoe UI"/>
+              </a:rPr>
+              <a:t>W. Liu, W. Luo, D. Lian, S. Gao, Future frame prediction for anomaly detection — A new baseline, in: Proc. IEEE/CVF Conf. Comput. Vis. Pattern Recognit. (CVPR), 2018, pp. 6536–6545.</a:t>
             </a:r>
           </a:p>
         </p:txBody>
@@ -21583,8 +21484,8 @@
         </p:nvSpPr>
         <p:spPr>
           <a:xfrm>
-            <a:off x="777240" y="4133088"/>
-            <a:ext cx="5090007" cy="384048"/>
+            <a:off x="777240" y="3593591"/>
+            <a:ext cx="10637215" cy="274320"/>
           </a:xfrm>
           <a:prstGeom prst="rect">
             <a:avLst/>
@@ -21599,26 +21500,26 @@
           <a:p>
             <a:pPr>
               <a:lnSpc>
-                <a:spcPct val="110000"/>
+                <a:spcPct val="102000"/>
               </a:lnSpc>
             </a:pPr>
             <a:r>
-              <a:rPr sz="1000" b="1">
+              <a:rPr sz="900" b="1">
                 <a:solidFill>
                   <a:srgbClr val="141C1E"/>
                 </a:solidFill>
                 <a:latin typeface="Segoe UI"/>
               </a:rPr>
-              <a:t>Ahn et al.  </a:t>
-            </a:r>
-            <a:r>
-              <a:rPr sz="1000">
-                <a:solidFill>
-                  <a:srgbClr val="617274"/>
-                </a:solidFill>
-                <a:latin typeface="Segoe UI"/>
-              </a:rPr>
-              <a:t>AnyAnomaly: customisable VAD. arXiv 2503.04504, 2025.</a:t>
+              <a:t>[22]  </a:t>
+            </a:r>
+            <a:r>
+              <a:rPr sz="900">
+                <a:solidFill>
+                  <a:srgbClr val="141C1E"/>
+                </a:solidFill>
+                <a:latin typeface="Segoe UI"/>
+              </a:rPr>
+              <a:t>A. Dosovitskiy, L. Beyer, A. Kolesnikov, D. Weissenborn, X. Zhai, T. Unterthiner, M. Dehghani, M. Minderer, G. Heigold, S. Gelly, J. Uszkoreit, N. Houlsby, An image is worth 16x16 words: Transformers for image recognition at scale, in: Proc. Int. Conf. Learn. Represent. (ICLR), 2021.</a:t>
             </a:r>
           </a:p>
         </p:txBody>
@@ -21631,8 +21532,8 @@
         </p:nvSpPr>
         <p:spPr>
           <a:xfrm>
-            <a:off x="777240" y="4535424"/>
-            <a:ext cx="5090007" cy="384048"/>
+            <a:off x="777240" y="3899915"/>
+            <a:ext cx="10637215" cy="274320"/>
           </a:xfrm>
           <a:prstGeom prst="rect">
             <a:avLst/>
@@ -21647,26 +21548,26 @@
           <a:p>
             <a:pPr>
               <a:lnSpc>
-                <a:spcPct val="110000"/>
+                <a:spcPct val="102000"/>
               </a:lnSpc>
             </a:pPr>
             <a:r>
-              <a:rPr sz="1000" b="1">
+              <a:rPr sz="900" b="1">
                 <a:solidFill>
                   <a:srgbClr val="141C1E"/>
                 </a:solidFill>
                 <a:latin typeface="Segoe UI"/>
               </a:rPr>
-              <a:t>Roth et al.  </a:t>
-            </a:r>
-            <a:r>
-              <a:rPr sz="1000">
-                <a:solidFill>
-                  <a:srgbClr val="617274"/>
-                </a:solidFill>
-                <a:latin typeface="Segoe UI"/>
-              </a:rPr>
-              <a:t>PatchCore: total recall in industrial anomaly detection. CVPR 2022.</a:t>
+              <a:t>[23]  </a:t>
+            </a:r>
+            <a:r>
+              <a:rPr sz="900">
+                <a:solidFill>
+                  <a:srgbClr val="141C1E"/>
+                </a:solidFill>
+                <a:latin typeface="Segoe UI"/>
+              </a:rPr>
+              <a:t>A. Vaswani, N. Shazeer, N. Parmar, J. Uszkoreit, L. Jones, A. N. Gomez, L. Kaiser, I. Polosukhin, Attention is all you need, in: Adv. Neural Inf. Process. Syst. (NeurIPS), 2017, pp. 5998–6008.</a:t>
             </a:r>
           </a:p>
         </p:txBody>
@@ -21679,8 +21580,8 @@
         </p:nvSpPr>
         <p:spPr>
           <a:xfrm>
-            <a:off x="6324447" y="1810512"/>
-            <a:ext cx="5090007" cy="237744"/>
+            <a:off x="777240" y="4206240"/>
+            <a:ext cx="10637215" cy="274320"/>
           </a:xfrm>
           <a:prstGeom prst="rect">
             <a:avLst/>
@@ -21693,19 +21594,28 @@
           </a:bodyPr>
           <a:lstStyle/>
           <a:p>
-            <a:pPr algn="l">
+            <a:pPr>
               <a:lnSpc>
-                <a:spcPct val="100000"/>
+                <a:spcPct val="102000"/>
               </a:lnSpc>
             </a:pPr>
             <a:r>
-              <a:rPr sz="1000" b="1" i="0">
-                <a:solidFill>
-                  <a:srgbClr val="0D6B67"/>
-                </a:solidFill>
-                <a:latin typeface="Segoe UI"/>
-              </a:rPr>
-              <a:t>MODELS USED, ALL FROZEN</a:t>
+              <a:rPr sz="900" b="1">
+                <a:solidFill>
+                  <a:srgbClr val="141C1E"/>
+                </a:solidFill>
+                <a:latin typeface="Segoe UI"/>
+              </a:rPr>
+              <a:t>[24]  </a:t>
+            </a:r>
+            <a:r>
+              <a:rPr sz="900">
+                <a:solidFill>
+                  <a:srgbClr val="141C1E"/>
+                </a:solidFill>
+                <a:latin typeface="Segoe UI"/>
+              </a:rPr>
+              <a:t>H. Liu, C. Li, Q. Wu, Y. J. Lee, Visual instruction tuning, in: Adv. Neural Inf. Process. Syst. (NeurIPS), 2023, pp. 34892–34916.</a:t>
             </a:r>
           </a:p>
         </p:txBody>
@@ -21718,8 +21628,8 @@
         </p:nvSpPr>
         <p:spPr>
           <a:xfrm>
-            <a:off x="6324447" y="2121408"/>
-            <a:ext cx="5090007" cy="384048"/>
+            <a:off x="777240" y="4512564"/>
+            <a:ext cx="10637215" cy="274320"/>
           </a:xfrm>
           <a:prstGeom prst="rect">
             <a:avLst/>
@@ -21734,26 +21644,26 @@
           <a:p>
             <a:pPr>
               <a:lnSpc>
-                <a:spcPct val="110000"/>
+                <a:spcPct val="102000"/>
               </a:lnSpc>
             </a:pPr>
             <a:r>
-              <a:rPr sz="1000" b="1">
+              <a:rPr sz="900" b="1">
                 <a:solidFill>
                   <a:srgbClr val="141C1E"/>
                 </a:solidFill>
                 <a:latin typeface="Segoe UI"/>
               </a:rPr>
-              <a:t>Radford et al.  </a:t>
-            </a:r>
-            <a:r>
-              <a:rPr sz="1000">
-                <a:solidFill>
-                  <a:srgbClr val="617274"/>
-                </a:solidFill>
-                <a:latin typeface="Segoe UI"/>
-              </a:rPr>
-              <a:t>CLIP. ICML 2021.</a:t>
+              <a:t>[25]  </a:t>
+            </a:r>
+            <a:r>
+              <a:rPr sz="900">
+                <a:solidFill>
+                  <a:srgbClr val="141C1E"/>
+                </a:solidFill>
+                <a:latin typeface="Segoe UI"/>
+              </a:rPr>
+              <a:t>T. Dettmers, A. Pagnoni, A. Holtzman, L. Zettlemoyer, QLoRA: Efficient finetuning of quantized LLMs, in: Adv. Neural Inf. Process. Syst. (NeurIPS), 2023, pp. 10088–10115.</a:t>
             </a:r>
           </a:p>
         </p:txBody>
@@ -21766,8 +21676,8 @@
         </p:nvSpPr>
         <p:spPr>
           <a:xfrm>
-            <a:off x="6324447" y="2523744"/>
-            <a:ext cx="5090007" cy="384048"/>
+            <a:off x="777240" y="4818888"/>
+            <a:ext cx="10637215" cy="274320"/>
           </a:xfrm>
           <a:prstGeom prst="rect">
             <a:avLst/>
@@ -21782,26 +21692,26 @@
           <a:p>
             <a:pPr>
               <a:lnSpc>
-                <a:spcPct val="110000"/>
+                <a:spcPct val="102000"/>
               </a:lnSpc>
             </a:pPr>
             <a:r>
-              <a:rPr sz="1000" b="1">
+              <a:rPr sz="900" b="1">
                 <a:solidFill>
                   <a:srgbClr val="141C1E"/>
                 </a:solidFill>
                 <a:latin typeface="Segoe UI"/>
               </a:rPr>
-              <a:t>Dosovitskiy et al.  </a:t>
-            </a:r>
-            <a:r>
-              <a:rPr sz="1000">
-                <a:solidFill>
-                  <a:srgbClr val="617274"/>
-                </a:solidFill>
-                <a:latin typeface="Segoe UI"/>
-              </a:rPr>
-              <a:t>An image is worth 16x16 words (ViT). ICLR 2021.</a:t>
+              <a:t>[26]  </a:t>
+            </a:r>
+            <a:r>
+              <a:rPr sz="900">
+                <a:solidFill>
+                  <a:srgbClr val="141C1E"/>
+                </a:solidFill>
+                <a:latin typeface="Segoe UI"/>
+              </a:rPr>
+              <a:t>C. Lu, J. Shi, J. Jia, Abnormal event detection at 150 FPS in MATLAB, in: Proc. IEEE Int. Conf. Comput. Vis. (ICCV), 2013, pp. 2720–2727.</a:t>
             </a:r>
           </a:p>
         </p:txBody>
@@ -21814,8 +21724,8 @@
         </p:nvSpPr>
         <p:spPr>
           <a:xfrm>
-            <a:off x="6324447" y="2926079"/>
-            <a:ext cx="5090007" cy="384048"/>
+            <a:off x="777240" y="5125212"/>
+            <a:ext cx="10637215" cy="274320"/>
           </a:xfrm>
           <a:prstGeom prst="rect">
             <a:avLst/>
@@ -21830,26 +21740,26 @@
           <a:p>
             <a:pPr>
               <a:lnSpc>
-                <a:spcPct val="110000"/>
+                <a:spcPct val="102000"/>
               </a:lnSpc>
             </a:pPr>
             <a:r>
-              <a:rPr sz="1000" b="1">
+              <a:rPr sz="900" b="1">
                 <a:solidFill>
                   <a:srgbClr val="141C1E"/>
                 </a:solidFill>
                 <a:latin typeface="Segoe UI"/>
               </a:rPr>
-              <a:t>Vaswani et al.  </a:t>
-            </a:r>
-            <a:r>
-              <a:rPr sz="1000">
-                <a:solidFill>
-                  <a:srgbClr val="617274"/>
-                </a:solidFill>
-                <a:latin typeface="Segoe UI"/>
-              </a:rPr>
-              <a:t>Attention is all you need. NeurIPS 2017.</a:t>
+              <a:t>[27]  </a:t>
+            </a:r>
+            <a:r>
+              <a:rPr sz="900">
+                <a:solidFill>
+                  <a:srgbClr val="141C1E"/>
+                </a:solidFill>
+                <a:latin typeface="Segoe UI"/>
+              </a:rPr>
+              <a:t>T. Fawcett, An introduction to ROC analysis, Pattern Recognit. Lett. 27 (2006) 861–874.</a:t>
             </a:r>
           </a:p>
         </p:txBody>
@@ -21862,8 +21772,8 @@
         </p:nvSpPr>
         <p:spPr>
           <a:xfrm>
-            <a:off x="6324447" y="3328415"/>
-            <a:ext cx="5090007" cy="384048"/>
+            <a:off x="777240" y="5431536"/>
+            <a:ext cx="10637215" cy="274320"/>
           </a:xfrm>
           <a:prstGeom prst="rect">
             <a:avLst/>
@@ -21878,26 +21788,26 @@
           <a:p>
             <a:pPr>
               <a:lnSpc>
-                <a:spcPct val="110000"/>
+                <a:spcPct val="102000"/>
               </a:lnSpc>
             </a:pPr>
             <a:r>
-              <a:rPr sz="1000" b="1">
+              <a:rPr sz="900" b="1">
                 <a:solidFill>
                   <a:srgbClr val="141C1E"/>
                 </a:solidFill>
                 <a:latin typeface="Segoe UI"/>
               </a:rPr>
-              <a:t>Liu et al.  </a:t>
-            </a:r>
-            <a:r>
-              <a:rPr sz="1000">
-                <a:solidFill>
-                  <a:srgbClr val="617274"/>
-                </a:solidFill>
-                <a:latin typeface="Segoe UI"/>
-              </a:rPr>
-              <a:t>LLaVA: visual instruction tuning. NeurIPS 2023.</a:t>
+              <a:t>[28]  </a:t>
+            </a:r>
+            <a:r>
+              <a:rPr sz="900">
+                <a:solidFill>
+                  <a:srgbClr val="141C1E"/>
+                </a:solidFill>
+                <a:latin typeface="Segoe UI"/>
+              </a:rPr>
+              <a:t>A. P. Bradley, The use of the area under the ROC curve in the evaluation of machine learning algorithms, Pattern Recognit. 30 (1997) 1145–1159.</a:t>
             </a:r>
           </a:p>
         </p:txBody>
@@ -21910,8 +21820,8 @@
         </p:nvSpPr>
         <p:spPr>
           <a:xfrm>
-            <a:off x="6324447" y="3730752"/>
-            <a:ext cx="5090007" cy="384048"/>
+            <a:off x="777240" y="5737859"/>
+            <a:ext cx="10637215" cy="274320"/>
           </a:xfrm>
           <a:prstGeom prst="rect">
             <a:avLst/>
@@ -21926,26 +21836,26 @@
           <a:p>
             <a:pPr>
               <a:lnSpc>
-                <a:spcPct val="110000"/>
+                <a:spcPct val="102000"/>
               </a:lnSpc>
             </a:pPr>
             <a:r>
-              <a:rPr sz="1000" b="1">
+              <a:rPr sz="900" b="1">
                 <a:solidFill>
                   <a:srgbClr val="141C1E"/>
                 </a:solidFill>
                 <a:latin typeface="Segoe UI"/>
               </a:rPr>
-              <a:t>Dettmers et al.  </a:t>
-            </a:r>
-            <a:r>
-              <a:rPr sz="1000">
-                <a:solidFill>
-                  <a:srgbClr val="617274"/>
-                </a:solidFill>
-                <a:latin typeface="Segoe UI"/>
-              </a:rPr>
-              <a:t>QLoRA: 4-bit quantisation. NeurIPS 2023.</a:t>
+              <a:t>[29]  </a:t>
+            </a:r>
+            <a:r>
+              <a:rPr sz="900">
+                <a:solidFill>
+                  <a:srgbClr val="141C1E"/>
+                </a:solidFill>
+                <a:latin typeface="Segoe UI"/>
+              </a:rPr>
+              <a:t>J. Davis, M. Goadrich, The relationship between precision-recall and ROC curves, in: Proc. Int. Conf. Mach. Learn. (ICML), 2006, pp. 233–240.</a:t>
             </a:r>
           </a:p>
         </p:txBody>
@@ -21958,8 +21868,8 @@
         </p:nvSpPr>
         <p:spPr>
           <a:xfrm>
-            <a:off x="6324447" y="4261104"/>
-            <a:ext cx="5090007" cy="237744"/>
+            <a:off x="777240" y="6044183"/>
+            <a:ext cx="10637215" cy="274320"/>
           </a:xfrm>
           <a:prstGeom prst="rect">
             <a:avLst/>
@@ -21972,211 +21882,28 @@
           </a:bodyPr>
           <a:lstStyle/>
           <a:p>
-            <a:pPr algn="l">
+            <a:pPr>
               <a:lnSpc>
-                <a:spcPct val="100000"/>
+                <a:spcPct val="102000"/>
               </a:lnSpc>
             </a:pPr>
             <a:r>
-              <a:rPr sz="1000" b="1" i="0">
-                <a:solidFill>
-                  <a:srgbClr val="0D6B67"/>
-                </a:solidFill>
-                <a:latin typeface="Segoe UI"/>
-              </a:rPr>
-              <a:t>BASELINE AND EVALUATION METRICS</a:t>
-            </a:r>
-          </a:p>
-        </p:txBody>
-      </p:sp>
-      <p:sp>
-        <p:nvSpPr>
-          <p:cNvPr id="22" name="TextBox 21"/>
-          <p:cNvSpPr txBox="1"/>
-          <p:nvPr/>
-        </p:nvSpPr>
-        <p:spPr>
-          <a:xfrm>
-            <a:off x="6324447" y="4572000"/>
-            <a:ext cx="5090007" cy="384048"/>
-          </a:xfrm>
-          <a:prstGeom prst="rect">
-            <a:avLst/>
-          </a:prstGeom>
-          <a:noFill/>
-        </p:spPr>
-        <p:txBody>
-          <a:bodyPr wrap="square" lIns="0" rIns="0" tIns="0" bIns="0">
-            <a:spAutoFit/>
-          </a:bodyPr>
-          <a:lstStyle/>
-          <a:p>
-            <a:pPr>
-              <a:lnSpc>
-                <a:spcPct val="110000"/>
-              </a:lnSpc>
-            </a:pPr>
-            <a:r>
-              <a:rPr sz="1000" b="1">
+              <a:rPr sz="900" b="1">
                 <a:solidFill>
                   <a:srgbClr val="141C1E"/>
                 </a:solidFill>
                 <a:latin typeface="Segoe UI"/>
               </a:rPr>
-              <a:t>Schölkopf et al.  </a:t>
-            </a:r>
-            <a:r>
-              <a:rPr sz="1000">
-                <a:solidFill>
-                  <a:srgbClr val="617274"/>
-                </a:solidFill>
-                <a:latin typeface="Segoe UI"/>
-              </a:rPr>
-              <a:t>One-class SVM. Neural Comput. 2001.</a:t>
-            </a:r>
-          </a:p>
-        </p:txBody>
-      </p:sp>
-      <p:sp>
-        <p:nvSpPr>
-          <p:cNvPr id="23" name="TextBox 22"/>
-          <p:cNvSpPr txBox="1"/>
-          <p:nvPr/>
-        </p:nvSpPr>
-        <p:spPr>
-          <a:xfrm>
-            <a:off x="6324447" y="4974336"/>
-            <a:ext cx="5090007" cy="384048"/>
-          </a:xfrm>
-          <a:prstGeom prst="rect">
-            <a:avLst/>
-          </a:prstGeom>
-          <a:noFill/>
-        </p:spPr>
-        <p:txBody>
-          <a:bodyPr wrap="square" lIns="0" rIns="0" tIns="0" bIns="0">
-            <a:spAutoFit/>
-          </a:bodyPr>
-          <a:lstStyle/>
-          <a:p>
-            <a:pPr>
-              <a:lnSpc>
-                <a:spcPct val="110000"/>
-              </a:lnSpc>
-            </a:pPr>
-            <a:r>
-              <a:rPr sz="1000" b="1">
+              <a:t>[30]  </a:t>
+            </a:r>
+            <a:r>
+              <a:rPr sz="900">
                 <a:solidFill>
                   <a:srgbClr val="141C1E"/>
                 </a:solidFill>
                 <a:latin typeface="Segoe UI"/>
               </a:rPr>
-              <a:t>Fawcett  </a:t>
-            </a:r>
-            <a:r>
-              <a:rPr sz="1000">
-                <a:solidFill>
-                  <a:srgbClr val="617274"/>
-                </a:solidFill>
-                <a:latin typeface="Segoe UI"/>
-              </a:rPr>
-              <a:t>An introduction to ROC analysis. Pattern Recognit. Lett. 2006.</a:t>
-            </a:r>
-          </a:p>
-        </p:txBody>
-      </p:sp>
-      <p:sp>
-        <p:nvSpPr>
-          <p:cNvPr id="24" name="TextBox 23"/>
-          <p:cNvSpPr txBox="1"/>
-          <p:nvPr/>
-        </p:nvSpPr>
-        <p:spPr>
-          <a:xfrm>
-            <a:off x="6324447" y="5376672"/>
-            <a:ext cx="5090007" cy="384048"/>
-          </a:xfrm>
-          <a:prstGeom prst="rect">
-            <a:avLst/>
-          </a:prstGeom>
-          <a:noFill/>
-        </p:spPr>
-        <p:txBody>
-          <a:bodyPr wrap="square" lIns="0" rIns="0" tIns="0" bIns="0">
-            <a:spAutoFit/>
-          </a:bodyPr>
-          <a:lstStyle/>
-          <a:p>
-            <a:pPr>
-              <a:lnSpc>
-                <a:spcPct val="110000"/>
-              </a:lnSpc>
-            </a:pPr>
-            <a:r>
-              <a:rPr sz="1000" b="1">
-                <a:solidFill>
-                  <a:srgbClr val="141C1E"/>
-                </a:solidFill>
-                <a:latin typeface="Segoe UI"/>
-              </a:rPr>
-              <a:t>Davis &amp; Goadrich  </a:t>
-            </a:r>
-            <a:r>
-              <a:rPr sz="1000">
-                <a:solidFill>
-                  <a:srgbClr val="617274"/>
-                </a:solidFill>
-                <a:latin typeface="Segoe UI"/>
-              </a:rPr>
-              <a:t>Precision-recall and ROC curves. ICML 2006.</a:t>
-            </a:r>
-          </a:p>
-        </p:txBody>
-      </p:sp>
-      <p:sp>
-        <p:nvSpPr>
-          <p:cNvPr id="25" name="TextBox 24"/>
-          <p:cNvSpPr txBox="1"/>
-          <p:nvPr/>
-        </p:nvSpPr>
-        <p:spPr>
-          <a:xfrm>
-            <a:off x="6324447" y="5779008"/>
-            <a:ext cx="5090007" cy="384048"/>
-          </a:xfrm>
-          <a:prstGeom prst="rect">
-            <a:avLst/>
-          </a:prstGeom>
-          <a:noFill/>
-        </p:spPr>
-        <p:txBody>
-          <a:bodyPr wrap="square" lIns="0" rIns="0" tIns="0" bIns="0">
-            <a:spAutoFit/>
-          </a:bodyPr>
-          <a:lstStyle/>
-          <a:p>
-            <a:pPr>
-              <a:lnSpc>
-                <a:spcPct val="110000"/>
-              </a:lnSpc>
-            </a:pPr>
-            <a:r>
-              <a:rPr sz="1000" b="1">
-                <a:solidFill>
-                  <a:srgbClr val="141C1E"/>
-                </a:solidFill>
-                <a:latin typeface="Segoe UI"/>
-              </a:rPr>
-              <a:t>Bradley  </a:t>
-            </a:r>
-            <a:r>
-              <a:rPr sz="1000">
-                <a:solidFill>
-                  <a:srgbClr val="617274"/>
-                </a:solidFill>
-                <a:latin typeface="Segoe UI"/>
-              </a:rPr>
-              <a:t>Area under the ROC curve. Pattern Recognit. 1997.</a:t>
+              <a:t>B. Schölkopf, J. C. Platt, J. Shawe-Taylor, A. J. Smola, R. C. Williamson, Estimating the support of a high-dimensional distribution, Neural Comput. 13 (2001) 1443–1471.</a:t>
             </a:r>
           </a:p>
         </p:txBody>
@@ -22438,7 +22165,7 @@
                 </a:solidFill>
                 <a:latin typeface="Segoe UI"/>
               </a:rPr>
-              <a:t>Domain adaptation distinguishes between kinds of difference between places.</a:t>
+              <a:t>Domain adaptation distinguishes between kinds of difference between places. [11–15, 20]</a:t>
             </a:r>
           </a:p>
         </p:txBody>
@@ -22844,7 +22571,7 @@
                 </a:solidFill>
                 <a:latin typeface="Segoe UI"/>
               </a:rPr>
-              <a:t>“Concept shift is usually not a common problem in popular object classification… this review mainly focuses on covariate shift.”   — Liu et al., 2022.   Singhal et al. (2023) list stable p(y|x) as the first condition under which domain adaptation is justified.</a:t>
+              <a:t>“Concept shift is usually not a common problem in popular object classification… this review mainly focuses on covariate shift.”   — Liu et al., 2022 [14].   Singhal et al. [15] list stable p(y|x) as the first condition under which domain adaptation is justified.</a:t>
             </a:r>
           </a:p>
         </p:txBody>
@@ -23622,7 +23349,7 @@
                 </a:solidFill>
                 <a:latin typeface="Segoe UI"/>
               </a:rPr>
-              <a:t>Methods that align appearance cannot help here — the appearance is already identical. Two domains can share p(x) exactly while the labelling function differs. A 2026 position paper argues the same premise independently; what is missing is a test of whether supplied context does any work.</a:t>
+              <a:t>Methods that align appearance cannot help here — the appearance is already identical. Two domains can share p(x) exactly while the labelling function differs. A 2026 position paper [1] argues the same premise independently; what is missing is a test of whether supplied context does any work.</a:t>
             </a:r>
           </a:p>
         </p:txBody>
@@ -23866,8 +23593,8 @@
         </p:blipFill>
         <p:spPr>
           <a:xfrm>
-            <a:off x="777240" y="1783080"/>
-            <a:ext cx="6858000" cy="3788685"/>
+            <a:off x="777240" y="1645920"/>
+            <a:ext cx="8092440" cy="4768759"/>
           </a:xfrm>
           <a:prstGeom prst="rect">
             <a:avLst/>
@@ -23882,8 +23609,8 @@
         </p:nvSpPr>
         <p:spPr>
           <a:xfrm>
-            <a:off x="7955279" y="1783080"/>
-            <a:ext cx="3364992" cy="274320"/>
+            <a:off x="9144000" y="1645920"/>
+            <a:ext cx="2651760" cy="274320"/>
           </a:xfrm>
           <a:prstGeom prst="rect">
             <a:avLst/>
@@ -23921,7 +23648,7 @@
         </p:nvSpPr>
         <p:spPr>
           <a:xfrm>
-            <a:off x="7955279" y="2331720"/>
+            <a:off x="9144000" y="2194560"/>
             <a:ext cx="68580" cy="68580"/>
           </a:xfrm>
           <a:prstGeom prst="rect">
@@ -23965,8 +23692,8 @@
         </p:nvSpPr>
         <p:spPr>
           <a:xfrm>
-            <a:off x="8193023" y="2203704"/>
-            <a:ext cx="3127248" cy="365760"/>
+            <a:off x="9381744" y="2066543"/>
+            <a:ext cx="2414015" cy="365760"/>
           </a:xfrm>
           <a:prstGeom prst="rect">
             <a:avLst/>
@@ -23985,7 +23712,7 @@
               </a:lnSpc>
             </a:pPr>
             <a:r>
-              <a:rPr sz="1300" b="1">
+              <a:rPr sz="1150" b="1">
                 <a:solidFill>
                   <a:srgbClr val="141C1E"/>
                 </a:solidFill>
@@ -23994,13 +23721,13 @@
               <a:t>M1  </a:t>
             </a:r>
             <a:r>
-              <a:rPr sz="1300">
+              <a:rPr sz="1150">
                 <a:solidFill>
                   <a:srgbClr val="3A4A4C"/>
                 </a:solidFill>
                 <a:latin typeface="Segoe UI"/>
               </a:rPr>
-              <a:t>Frozen CLIP scores each frame against “normal” and “abnormal” text.</a:t>
+              <a:t>Frozen CLIP [2] scores each frame: normal vs abnormal text.</a:t>
             </a:r>
           </a:p>
         </p:txBody>
@@ -24013,7 +23740,7 @@
         </p:nvSpPr>
         <p:spPr>
           <a:xfrm>
-            <a:off x="7955279" y="3044952"/>
+            <a:off x="9144000" y="2944368"/>
             <a:ext cx="68580" cy="68580"/>
           </a:xfrm>
           <a:prstGeom prst="rect">
@@ -24057,8 +23784,8 @@
         </p:nvSpPr>
         <p:spPr>
           <a:xfrm>
-            <a:off x="8193023" y="2916936"/>
-            <a:ext cx="3127248" cy="365760"/>
+            <a:off x="9381744" y="2816351"/>
+            <a:ext cx="2414015" cy="365760"/>
           </a:xfrm>
           <a:prstGeom prst="rect">
             <a:avLst/>
@@ -24077,7 +23804,7 @@
               </a:lnSpc>
             </a:pPr>
             <a:r>
-              <a:rPr sz="1300" b="1">
+              <a:rPr sz="1150" b="1">
                 <a:solidFill>
                   <a:srgbClr val="141C1E"/>
                 </a:solidFill>
@@ -24086,7 +23813,7 @@
               <a:t>M2  </a:t>
             </a:r>
             <a:r>
-              <a:rPr sz="1300">
+              <a:rPr sz="1150">
                 <a:solidFill>
                   <a:srgbClr val="3A4A4C"/>
                 </a:solidFill>
@@ -24105,7 +23832,7 @@
         </p:nvSpPr>
         <p:spPr>
           <a:xfrm>
-            <a:off x="7955279" y="3758184"/>
+            <a:off x="9144000" y="3694175"/>
             <a:ext cx="68580" cy="68580"/>
           </a:xfrm>
           <a:prstGeom prst="rect">
@@ -24149,8 +23876,8 @@
         </p:nvSpPr>
         <p:spPr>
           <a:xfrm>
-            <a:off x="8193023" y="3630168"/>
-            <a:ext cx="3127248" cy="365760"/>
+            <a:off x="9381744" y="3566159"/>
+            <a:ext cx="2414015" cy="365760"/>
           </a:xfrm>
           <a:prstGeom prst="rect">
             <a:avLst/>
@@ -24169,7 +23896,7 @@
               </a:lnSpc>
             </a:pPr>
             <a:r>
-              <a:rPr sz="1300" b="1">
+              <a:rPr sz="1150" b="1">
                 <a:solidFill>
                   <a:srgbClr val="141C1E"/>
                 </a:solidFill>
@@ -24178,7 +23905,7 @@
               <a:t>M3  </a:t>
             </a:r>
             <a:r>
-              <a:rPr sz="1300">
+              <a:rPr sz="1150">
                 <a:solidFill>
                   <a:srgbClr val="3A4A4C"/>
                 </a:solidFill>
@@ -24197,7 +23924,7 @@
         </p:nvSpPr>
         <p:spPr>
           <a:xfrm>
-            <a:off x="7955279" y="4471416"/>
+            <a:off x="9144000" y="4443983"/>
             <a:ext cx="68580" cy="68580"/>
           </a:xfrm>
           <a:prstGeom prst="rect">
@@ -24241,8 +23968,8 @@
         </p:nvSpPr>
         <p:spPr>
           <a:xfrm>
-            <a:off x="8193023" y="4343400"/>
-            <a:ext cx="3127248" cy="365760"/>
+            <a:off x="9381744" y="4315968"/>
+            <a:ext cx="2414015" cy="365760"/>
           </a:xfrm>
           <a:prstGeom prst="rect">
             <a:avLst/>
@@ -24261,7 +23988,7 @@
               </a:lnSpc>
             </a:pPr>
             <a:r>
-              <a:rPr sz="1300" b="1">
+              <a:rPr sz="1150" b="1">
                 <a:solidFill>
                   <a:srgbClr val="141C1E"/>
                 </a:solidFill>
@@ -24270,13 +23997,13 @@
               <a:t>M4  </a:t>
             </a:r>
             <a:r>
-              <a:rPr sz="1300">
+              <a:rPr sz="1150">
                 <a:solidFill>
                   <a:srgbClr val="3A4A4C"/>
                 </a:solidFill>
                 <a:latin typeface="Segoe UI"/>
               </a:rPr>
-              <a:t>Frozen LLaVA explains each detected event.</a:t>
+              <a:t>Frozen LLaVA [24] explains each detected event.</a:t>
             </a:r>
           </a:p>
         </p:txBody>
@@ -24289,8 +24016,8 @@
         </p:nvSpPr>
         <p:spPr>
           <a:xfrm>
-            <a:off x="7955279" y="5166360"/>
-            <a:ext cx="3364992" cy="1051560"/>
+            <a:off x="9144000" y="5257800"/>
+            <a:ext cx="2651760" cy="1051560"/>
           </a:xfrm>
           <a:prstGeom prst="rect">
             <a:avLst/>
@@ -24333,7 +24060,7 @@
         </p:nvSpPr>
         <p:spPr>
           <a:xfrm>
-            <a:off x="7955279" y="5166360"/>
+            <a:off x="9144000" y="5257800"/>
             <a:ext cx="45720" cy="1051560"/>
           </a:xfrm>
           <a:prstGeom prst="rect">
@@ -24377,8 +24104,8 @@
         </p:nvSpPr>
         <p:spPr>
           <a:xfrm>
-            <a:off x="8211311" y="5312664"/>
-            <a:ext cx="2862072" cy="219456"/>
+            <a:off x="9400032" y="5404104"/>
+            <a:ext cx="2148839" cy="219456"/>
           </a:xfrm>
           <a:prstGeom prst="rect">
             <a:avLst/>
@@ -24416,8 +24143,8 @@
         </p:nvSpPr>
         <p:spPr>
           <a:xfrm>
-            <a:off x="8211311" y="5605272"/>
-            <a:ext cx="2862072" cy="484631"/>
+            <a:off x="9400032" y="5696712"/>
+            <a:ext cx="2148839" cy="484631"/>
           </a:xfrm>
           <a:prstGeom prst="rect">
             <a:avLst/>
@@ -24442,7 +24169,7 @@
                 </a:solidFill>
                 <a:latin typeface="Segoe UI"/>
               </a:rPr>
-              <a:t>Moving to a new site = editing one sentence. No target data. No gradients.</a:t>
+              <a:t>Editing one sentence. No target data, no gradients.</a:t>
             </a:r>
           </a:p>
         </p:txBody>
@@ -25107,7 +24834,7 @@
                 </a:solidFill>
                 <a:latin typeface="Segoe UI"/>
               </a:rPr>
-              <a:t>This is what makes the adaptation claim testable rather than asserted. You cannot run our central experiment on the competing systems — their text is learned on source data, or entangled in an LLM prior, or accompanied by a trained adapter.</a:t>
+              <a:t>This is what makes the adaptation claim testable rather than asserted. You cannot run our central experiment on the competing systems — their text is learned on source data [4], or entangled in an LLM prior [7], or accompanied by a trained adapter [17].</a:t>
             </a:r>
           </a:p>
         </p:txBody>
@@ -26243,7 +25970,7 @@
                           </a:solidFill>
                           <a:latin typeface="Segoe UI"/>
                         </a:rPr>
-                        <a:t>ShanghaiTech (12 views) and CUHK Avenue (1 view)</a:t>
+                        <a:t>ShanghaiTech [21] (12 views) and CUHK Avenue [26] (1 view)</a:t>
                       </a:r>
                     </a:p>
                   </a:txBody>
@@ -26387,7 +26114,7 @@
                           </a:solidFill>
                           <a:latin typeface="Segoe UI"/>
                         </a:rPr>
-                        <a:t>CLIP ViT-L/14 (LAION-2B), frozen · PyTorch 2.3.1 / CUDA 12.1</a:t>
+                        <a:t>CLIP ViT-L/14 [2, 22] (LAION-2B), frozen · PyTorch 2.3.1 / CUDA 12.1</a:t>
                       </a:r>
                     </a:p>
                   </a:txBody>

--- a/docs/06_presentations/DA-ZVAD_Phase2_Review.pptx
+++ b/docs/06_presentations/DA-ZVAD_Phase2_Review.pptx
@@ -34,6 +34,7 @@
     <p:sldId id="282" r:id="rId33"/>
     <p:sldId id="283" r:id="rId34"/>
     <p:sldId id="284" r:id="rId35"/>
+    <p:sldId id="285" r:id="rId36"/>
   </p:sldIdLst>
   <p:sldSz cx="12191695" cy="6858000" type="screen4x3"/>
   <p:notesSz cx="6858000" cy="9144000"/>
@@ -2071,6 +2072,76 @@
           <a:p>
             <a:r>
               <a:t>This is the slide that shows you read the six surveys. Read the Liu quote aloud - the field scopes concept shift OUT by explicit decision. Make clear you are not criticising them: for object recognition it is the right call.</a:t>
+            </a:r>
+          </a:p>
+        </p:txBody>
+      </p:sp>
+      <p:sp>
+        <p:nvSpPr>
+          <p:cNvPr id="4" name="Slide Number Placeholder 3"/>
+          <p:cNvSpPr>
+            <a:spLocks noGrp="1"/>
+          </p:cNvSpPr>
+          <p:nvPr>
+            <p:ph type="sldNum" idx="5" sz="quarter"/>
+          </p:nvPr>
+        </p:nvSpPr>
+        <p:spPr/>
+      </p:sp>
+    </p:spTree>
+  </p:cSld>
+  <p:clrMapOvr>
+    <a:masterClrMapping/>
+  </p:clrMapOvr>
+</p:notes>
+</file>
+
+<file path=ppt/notesSlides/notesSlide30.xml><?xml version="1.0" encoding="utf-8"?>
+<p:notes xmlns:a="http://schemas.openxmlformats.org/drawingml/2006/main" xmlns:p="http://schemas.openxmlformats.org/presentationml/2006/main" xmlns:r="http://schemas.openxmlformats.org/officeDocument/2006/relationships">
+  <p:cSld>
+    <p:spTree>
+      <p:nvGrpSpPr>
+        <p:cNvPr id="1" name=""/>
+        <p:cNvGrpSpPr/>
+        <p:nvPr/>
+      </p:nvGrpSpPr>
+      <p:grpSpPr>
+        <a:xfrm>
+          <a:off x="0" y="0"/>
+          <a:ext cx="0" cy="0"/>
+          <a:chOff x="0" y="0"/>
+          <a:chExt cx="0" cy="0"/>
+        </a:xfrm>
+      </p:grpSpPr>
+      <p:sp>
+        <p:nvSpPr>
+          <p:cNvPr id="2" name="Slide Image Placeholder 1"/>
+          <p:cNvSpPr>
+            <a:spLocks noGrp="1"/>
+          </p:cNvSpPr>
+          <p:nvPr>
+            <p:ph type="sldImg" idx="2"/>
+          </p:nvPr>
+        </p:nvSpPr>
+        <p:spPr/>
+      </p:sp>
+      <p:sp>
+        <p:nvSpPr>
+          <p:cNvPr id="3" name="Notes Placeholder 2"/>
+          <p:cNvSpPr>
+            <a:spLocks noGrp="1"/>
+          </p:cNvSpPr>
+          <p:nvPr>
+            <p:ph type="body" idx="3" sz="quarter"/>
+          </p:nvPr>
+        </p:nvSpPr>
+        <p:spPr/>
+        <p:txBody>
+          <a:bodyPr/>
+          <a:lstStyle/>
+          <a:p>
+            <a:r>
+              <a:t>The third reference slide exists because the comparative analysis added seven entries. If asked which of these you actually read rather than cited from a table: the six DA surveys, AnyAnomaly, LAVAD and WinCLIP. The one-class figures are as tabulated by AnyAnomaly, and the slide says so.</a:t>
             </a:r>
           </a:p>
         </p:txBody>
@@ -16757,8 +16828,8 @@
           <p:nvPr/>
         </p:nvGraphicFramePr>
         <p:xfrm>
-          <a:off x="777240" y="1828800"/>
-          <a:ext cx="10634472" cy="2048256"/>
+          <a:off x="777240" y="1755648"/>
+          <a:ext cx="10634472" cy="2816352"/>
         </p:xfrm>
         <a:graphic>
           <a:graphicData uri="http://schemas.openxmlformats.org/drawingml/2006/table">
@@ -16767,11 +16838,11 @@
                 <a:tableStyleId>{5C22544A-7EE6-4342-B048-85BDC9FD1C3A}</a:tableStyleId>
               </a:tblPr>
               <a:tblGrid>
-                <a:gridCol w="5120640"/>
-                <a:gridCol w="2103120"/>
-                <a:gridCol w="3410712"/>
+                <a:gridCol w="6766560"/>
+                <a:gridCol w="1920240"/>
+                <a:gridCol w="1947672"/>
               </a:tblGrid>
-              <a:tr h="512064">
+              <a:tr h="402336">
                 <a:tc>
                   <a:txBody>
                     <a:bodyPr wrap="square"/>
@@ -16779,13 +16850,13 @@
                     <a:p>
                       <a:pPr algn="l"/>
                       <a:r>
-                        <a:rPr sz="1450" b="1">
+                        <a:rPr sz="1400" b="1">
                           <a:solidFill>
                             <a:srgbClr val="FFFFFF"/>
                           </a:solidFill>
                           <a:latin typeface="Segoe UI"/>
                         </a:rPr>
-                        <a:t>Method</a:t>
+                        <a:t>Training-free method (no target data)</a:t>
                       </a:r>
                     </a:p>
                   </a:txBody>
@@ -16802,13 +16873,13 @@
                     <a:p>
                       <a:pPr algn="l"/>
                       <a:r>
-                        <a:rPr sz="1450" b="1">
+                        <a:rPr sz="1400" b="1">
                           <a:solidFill>
                             <a:srgbClr val="FFFFFF"/>
                           </a:solidFill>
                           <a:latin typeface="Segoe UI"/>
                         </a:rPr>
-                        <a:t>AUROC</a:t>
+                        <a:t>Avenue</a:t>
                       </a:r>
                     </a:p>
                   </a:txBody>
@@ -16825,13 +16896,13 @@
                     <a:p>
                       <a:pPr algn="l"/>
                       <a:r>
-                        <a:rPr sz="1450" b="1">
+                        <a:rPr sz="1400" b="1">
                           <a:solidFill>
                             <a:srgbClr val="FFFFFF"/>
                           </a:solidFill>
                           <a:latin typeface="Segoe UI"/>
                         </a:rPr>
-                        <a:t>Cost per frame</a:t>
+                        <a:t>ShT</a:t>
                       </a:r>
                     </a:p>
                   </a:txBody>
@@ -16842,7 +16913,7 @@
                   </a:tcPr>
                 </a:tc>
               </a:tr>
-              <a:tr h="512064">
+              <a:tr h="402336">
                 <a:tc>
                   <a:txBody>
                     <a:bodyPr wrap="square"/>
@@ -16850,13 +16921,13 @@
                     <a:p>
                       <a:pPr algn="l"/>
                       <a:r>
-                        <a:rPr sz="1450" b="0">
+                        <a:rPr sz="1400" b="0">
                           <a:solidFill>
                             <a:srgbClr val="141C1E"/>
                           </a:solidFill>
                           <a:latin typeface="Segoe UI"/>
                         </a:rPr>
-                        <a:t>Liu et al. 2018 [21] — trained on the target scene</a:t>
+                        <a:t>Zero-shot CLIP [2]</a:t>
                       </a:r>
                     </a:p>
                   </a:txBody>
@@ -16873,13 +16944,13 @@
                     <a:p>
                       <a:pPr algn="l"/>
                       <a:r>
-                        <a:rPr sz="1450" b="0">
+                        <a:rPr sz="1400" b="0">
                           <a:solidFill>
                             <a:srgbClr val="141C1E"/>
                           </a:solidFill>
                           <a:latin typeface="Segoe UI"/>
                         </a:rPr>
-                        <a:t>≈ 0.728</a:t>
+                        <a:t>62.3</a:t>
                       </a:r>
                     </a:p>
                   </a:txBody>
@@ -16896,13 +16967,13 @@
                     <a:p>
                       <a:pPr algn="l"/>
                       <a:r>
-                        <a:rPr sz="1450" b="0">
+                        <a:rPr sz="1400" b="0">
                           <a:solidFill>
                             <a:srgbClr val="141C1E"/>
                           </a:solidFill>
                           <a:latin typeface="Segoe UI"/>
                         </a:rPr>
-                        <a:t>1 trained model</a:t>
+                        <a:t>60.9</a:t>
                       </a:r>
                     </a:p>
                   </a:txBody>
@@ -16913,7 +16984,7 @@
                   </a:tcPr>
                 </a:tc>
               </a:tr>
-              <a:tr h="512064">
+              <a:tr h="402336">
                 <a:tc>
                   <a:txBody>
                     <a:bodyPr wrap="square"/>
@@ -16921,13 +16992,13 @@
                     <a:p>
                       <a:pPr algn="l"/>
                       <a:r>
-                        <a:rPr sz="1450" b="0">
+                        <a:rPr sz="1400" b="0">
                           <a:solidFill>
                             <a:srgbClr val="141C1E"/>
                           </a:solidFill>
                           <a:latin typeface="Segoe UI"/>
                         </a:rPr>
-                        <a:t>LAVAD [7] (CVPR 2024), training-free</a:t>
+                        <a:t>Zero-shot ImageBind [36]</a:t>
                       </a:r>
                     </a:p>
                   </a:txBody>
@@ -16944,13 +17015,13 @@
                     <a:p>
                       <a:pPr algn="l"/>
                       <a:r>
-                        <a:rPr sz="1450" b="0">
+                        <a:rPr sz="1400" b="0">
                           <a:solidFill>
                             <a:srgbClr val="141C1E"/>
                           </a:solidFill>
                           <a:latin typeface="Segoe UI"/>
                         </a:rPr>
-                        <a:t>≈ 0.85</a:t>
+                        <a:t>64.5</a:t>
                       </a:r>
                     </a:p>
                   </a:txBody>
@@ -16967,13 +17038,13 @@
                     <a:p>
                       <a:pPr algn="l"/>
                       <a:r>
-                        <a:rPr sz="1450" b="0">
+                        <a:rPr sz="1400" b="0">
                           <a:solidFill>
                             <a:srgbClr val="141C1E"/>
                           </a:solidFill>
                           <a:latin typeface="Segoe UI"/>
                         </a:rPr>
-                        <a:t>Captioner + LLM + refiner</a:t>
+                        <a:t>61.3</a:t>
                       </a:r>
                     </a:p>
                   </a:txBody>
@@ -16984,7 +17055,7 @@
                   </a:tcPr>
                 </a:tc>
               </a:tr>
-              <a:tr h="512064">
+              <a:tr h="402336">
                 <a:tc>
                   <a:txBody>
                     <a:bodyPr wrap="square"/>
@@ -16992,13 +17063,226 @@
                     <a:p>
                       <a:pPr algn="l"/>
                       <a:r>
-                        <a:rPr sz="1450" b="1">
+                        <a:rPr sz="1400" b="0">
                           <a:solidFill>
                             <a:srgbClr val="141C1E"/>
                           </a:solidFill>
                           <a:latin typeface="Segoe UI"/>
                         </a:rPr>
-                        <a:t>DA-ZVAD (ours), training-free</a:t>
+                        <a:t>LLaVA-1.5 [24]</a:t>
+                      </a:r>
+                    </a:p>
+                  </a:txBody>
+                  <a:tcPr marL="128016" marR="128016" marT="45720" marB="45720" anchor="ctr">
+                    <a:solidFill>
+                      <a:srgbClr val="FFFFFF"/>
+                    </a:solidFill>
+                  </a:tcPr>
+                </a:tc>
+                <a:tc>
+                  <a:txBody>
+                    <a:bodyPr wrap="square"/>
+                    <a:lstStyle/>
+                    <a:p>
+                      <a:pPr algn="l"/>
+                      <a:r>
+                        <a:rPr sz="1400" b="0">
+                          <a:solidFill>
+                            <a:srgbClr val="141C1E"/>
+                          </a:solidFill>
+                          <a:latin typeface="Segoe UI"/>
+                        </a:rPr>
+                        <a:t>67.4</a:t>
+                      </a:r>
+                    </a:p>
+                  </a:txBody>
+                  <a:tcPr marL="128016" marR="128016" marT="45720" marB="45720" anchor="ctr">
+                    <a:solidFill>
+                      <a:srgbClr val="FFFFFF"/>
+                    </a:solidFill>
+                  </a:tcPr>
+                </a:tc>
+                <a:tc>
+                  <a:txBody>
+                    <a:bodyPr wrap="square"/>
+                    <a:lstStyle/>
+                    <a:p>
+                      <a:pPr algn="l"/>
+                      <a:r>
+                        <a:rPr sz="1400" b="0">
+                          <a:solidFill>
+                            <a:srgbClr val="141C1E"/>
+                          </a:solidFill>
+                          <a:latin typeface="Segoe UI"/>
+                        </a:rPr>
+                        <a:t>59.6</a:t>
+                      </a:r>
+                    </a:p>
+                  </a:txBody>
+                  <a:tcPr marL="128016" marR="128016" marT="45720" marB="45720" anchor="ctr">
+                    <a:solidFill>
+                      <a:srgbClr val="FFFFFF"/>
+                    </a:solidFill>
+                  </a:tcPr>
+                </a:tc>
+              </a:tr>
+              <a:tr h="402336">
+                <a:tc>
+                  <a:txBody>
+                    <a:bodyPr wrap="square"/>
+                    <a:lstStyle/>
+                    <a:p>
+                      <a:pPr algn="l"/>
+                      <a:r>
+                        <a:rPr sz="1400" b="0">
+                          <a:solidFill>
+                            <a:srgbClr val="141C1E"/>
+                          </a:solidFill>
+                          <a:latin typeface="Segoe UI"/>
+                        </a:rPr>
+                        <a:t>Video-ChatGPT [37]</a:t>
+                      </a:r>
+                    </a:p>
+                  </a:txBody>
+                  <a:tcPr marL="128016" marR="128016" marT="45720" marB="45720" anchor="ctr">
+                    <a:solidFill>
+                      <a:srgbClr val="F5F7F7"/>
+                    </a:solidFill>
+                  </a:tcPr>
+                </a:tc>
+                <a:tc>
+                  <a:txBody>
+                    <a:bodyPr wrap="square"/>
+                    <a:lstStyle/>
+                    <a:p>
+                      <a:pPr algn="l"/>
+                      <a:r>
+                        <a:rPr sz="1400" b="0">
+                          <a:solidFill>
+                            <a:srgbClr val="141C1E"/>
+                          </a:solidFill>
+                          <a:latin typeface="Segoe UI"/>
+                        </a:rPr>
+                        <a:t>76.9</a:t>
+                      </a:r>
+                    </a:p>
+                  </a:txBody>
+                  <a:tcPr marL="128016" marR="128016" marT="45720" marB="45720" anchor="ctr">
+                    <a:solidFill>
+                      <a:srgbClr val="F5F7F7"/>
+                    </a:solidFill>
+                  </a:tcPr>
+                </a:tc>
+                <a:tc>
+                  <a:txBody>
+                    <a:bodyPr wrap="square"/>
+                    <a:lstStyle/>
+                    <a:p>
+                      <a:pPr algn="l"/>
+                      <a:r>
+                        <a:rPr sz="1400" b="0">
+                          <a:solidFill>
+                            <a:srgbClr val="141C1E"/>
+                          </a:solidFill>
+                          <a:latin typeface="Segoe UI"/>
+                        </a:rPr>
+                        <a:t>69.1</a:t>
+                      </a:r>
+                    </a:p>
+                  </a:txBody>
+                  <a:tcPr marL="128016" marR="128016" marT="45720" marB="45720" anchor="ctr">
+                    <a:solidFill>
+                      <a:srgbClr val="F5F7F7"/>
+                    </a:solidFill>
+                  </a:tcPr>
+                </a:tc>
+              </a:tr>
+              <a:tr h="402336">
+                <a:tc>
+                  <a:txBody>
+                    <a:bodyPr wrap="square"/>
+                    <a:lstStyle/>
+                    <a:p>
+                      <a:pPr algn="l"/>
+                      <a:r>
+                        <a:rPr sz="1400" b="0">
+                          <a:solidFill>
+                            <a:srgbClr val="141C1E"/>
+                          </a:solidFill>
+                          <a:latin typeface="Segoe UI"/>
+                        </a:rPr>
+                        <a:t>DA-ZVAD (ours) — one frozen encoder + a sentence</a:t>
+                      </a:r>
+                    </a:p>
+                  </a:txBody>
+                  <a:tcPr marL="128016" marR="128016" marT="45720" marB="45720" anchor="ctr">
+                    <a:solidFill>
+                      <a:srgbClr val="FFFFFF"/>
+                    </a:solidFill>
+                  </a:tcPr>
+                </a:tc>
+                <a:tc>
+                  <a:txBody>
+                    <a:bodyPr wrap="square"/>
+                    <a:lstStyle/>
+                    <a:p>
+                      <a:pPr algn="l"/>
+                      <a:r>
+                        <a:rPr sz="1400" b="0">
+                          <a:solidFill>
+                            <a:srgbClr val="141C1E"/>
+                          </a:solidFill>
+                          <a:latin typeface="Segoe UI"/>
+                        </a:rPr>
+                        <a:t>70.6</a:t>
+                      </a:r>
+                    </a:p>
+                  </a:txBody>
+                  <a:tcPr marL="128016" marR="128016" marT="45720" marB="45720" anchor="ctr">
+                    <a:solidFill>
+                      <a:srgbClr val="FFFFFF"/>
+                    </a:solidFill>
+                  </a:tcPr>
+                </a:tc>
+                <a:tc>
+                  <a:txBody>
+                    <a:bodyPr wrap="square"/>
+                    <a:lstStyle/>
+                    <a:p>
+                      <a:pPr algn="l"/>
+                      <a:r>
+                        <a:rPr sz="1400" b="0">
+                          <a:solidFill>
+                            <a:srgbClr val="141C1E"/>
+                          </a:solidFill>
+                          <a:latin typeface="Segoe UI"/>
+                        </a:rPr>
+                        <a:t>73.4</a:t>
+                      </a:r>
+                    </a:p>
+                  </a:txBody>
+                  <a:tcPr marL="128016" marR="128016" marT="45720" marB="45720" anchor="ctr">
+                    <a:solidFill>
+                      <a:srgbClr val="FFFFFF"/>
+                    </a:solidFill>
+                  </a:tcPr>
+                </a:tc>
+              </a:tr>
+              <a:tr h="402336">
+                <a:tc>
+                  <a:txBody>
+                    <a:bodyPr wrap="square"/>
+                    <a:lstStyle/>
+                    <a:p>
+                      <a:pPr algn="l"/>
+                      <a:r>
+                        <a:rPr sz="1400" b="1">
+                          <a:solidFill>
+                            <a:srgbClr val="141C1E"/>
+                          </a:solidFill>
+                          <a:latin typeface="Segoe UI"/>
+                        </a:rPr>
+                        <a:t>AnyAnomaly [9] — 3 LVLM queries per segment</a:t>
                       </a:r>
                     </a:p>
                   </a:txBody>
@@ -17015,13 +17299,13 @@
                     <a:p>
                       <a:pPr algn="l"/>
                       <a:r>
-                        <a:rPr sz="1450" b="1">
+                        <a:rPr sz="1400" b="1">
                           <a:solidFill>
                             <a:srgbClr val="141C1E"/>
                           </a:solidFill>
                           <a:latin typeface="Segoe UI"/>
                         </a:rPr>
-                        <a:t>0.734</a:t>
+                        <a:t>87.3</a:t>
                       </a:r>
                     </a:p>
                   </a:txBody>
@@ -17038,13 +17322,13 @@
                     <a:p>
                       <a:pPr algn="l"/>
                       <a:r>
-                        <a:rPr sz="1450" b="1">
+                        <a:rPr sz="1400" b="1">
                           <a:solidFill>
                             <a:srgbClr val="141C1E"/>
                           </a:solidFill>
                           <a:latin typeface="Segoe UI"/>
                         </a:rPr>
-                        <a:t>One frozen encoder + a sentence</a:t>
+                        <a:t>79.7</a:t>
                       </a:r>
                     </a:p>
                   </a:txBody>
@@ -17067,7 +17351,7 @@
         </p:nvSpPr>
         <p:spPr>
           <a:xfrm>
-            <a:off x="777240" y="3931920"/>
+            <a:off x="777240" y="4553712"/>
             <a:ext cx="68580" cy="68580"/>
           </a:xfrm>
           <a:prstGeom prst="rect">
@@ -17111,7 +17395,7 @@
         </p:nvSpPr>
         <p:spPr>
           <a:xfrm>
-            <a:off x="1014983" y="3803904"/>
+            <a:off x="1014983" y="4425696"/>
             <a:ext cx="10399471" cy="365760"/>
           </a:xfrm>
           <a:prstGeom prst="rect">
@@ -17131,22 +17415,22 @@
               </a:lnSpc>
             </a:pPr>
             <a:r>
-              <a:rPr sz="1600" b="1">
+              <a:rPr sz="1400" b="1">
                 <a:solidFill>
                   <a:srgbClr val="141C1E"/>
                 </a:solidFill>
                 <a:latin typeface="Segoe UI"/>
               </a:rPr>
-              <a:t>The fair comparison is the trained baseline.  </a:t>
-            </a:r>
-            <a:r>
-              <a:rPr sz="1600">
+              <a:t>AnyAnomaly asks “is the thing I named happening?”  We ask “is anything happening that doesn’t belong here?”  </a:t>
+            </a:r>
+            <a:r>
+              <a:rPr sz="1400">
                 <a:solidFill>
                   <a:srgbClr val="3A4A4C"/>
                 </a:solidFill>
                 <a:latin typeface="Segoe UI"/>
               </a:rPr>
-              <a:t>We match the benchmark's own 2018 baseline while using none of its training data.</a:t>
+              <a:t>Theirs needs the operator to list what could go wrong. Ours needs a description of the ordinary. Their 79.7 is obtained by handing the model the benchmark’s own anomaly classes.</a:t>
             </a:r>
           </a:p>
         </p:txBody>
@@ -17159,7 +17443,7 @@
         </p:nvSpPr>
         <p:spPr>
           <a:xfrm>
-            <a:off x="777240" y="4846320"/>
+            <a:off x="777240" y="5376672"/>
             <a:ext cx="68580" cy="68580"/>
           </a:xfrm>
           <a:prstGeom prst="rect">
@@ -17203,7 +17487,7 @@
         </p:nvSpPr>
         <p:spPr>
           <a:xfrm>
-            <a:off x="1014983" y="4718304"/>
+            <a:off x="1014983" y="5248656"/>
             <a:ext cx="10399471" cy="365760"/>
           </a:xfrm>
           <a:prstGeom prst="rect">
@@ -17223,22 +17507,22 @@
               </a:lnSpc>
             </a:pPr>
             <a:r>
-              <a:rPr sz="1600" b="1">
+              <a:rPr sz="1400" b="1">
                 <a:solidFill>
                   <a:srgbClr val="141C1E"/>
                 </a:solidFill>
                 <a:latin typeface="Segoe UI"/>
               </a:rPr>
-              <a:t>We do not match LAVAD, and say so.  </a:t>
-            </a:r>
-            <a:r>
-              <a:rPr sz="1600">
+              <a:t>Most of our margin over the plain baselines is protocol, not language.  </a:t>
+            </a:r>
+            <a:r>
+              <a:rPr sz="1400">
                 <a:solidFill>
                   <a:srgbClr val="3A4A4C"/>
                 </a:solidFill>
                 <a:latin typeface="Segoe UI"/>
               </a:rPr>
-              <a:t>It runs three large models per frame. We run in about 7 GB.</a:t>
+              <a:t>With no descriptor we already reach 0.707 against zero-shot CLIP’s 60.9. The sentence adds 2.7 — the evidence for it is the mismatched condition, not this table.</a:t>
             </a:r>
           </a:p>
         </p:txBody>
@@ -17251,8 +17535,8 @@
         </p:nvSpPr>
         <p:spPr>
           <a:xfrm>
-            <a:off x="777240" y="5486400"/>
-            <a:ext cx="10637215" cy="1051560"/>
+            <a:off x="777240" y="5888736"/>
+            <a:ext cx="10637215" cy="749808"/>
           </a:xfrm>
           <a:prstGeom prst="rect">
             <a:avLst/>
@@ -17295,8 +17579,8 @@
         </p:nvSpPr>
         <p:spPr>
           <a:xfrm>
-            <a:off x="777240" y="5486400"/>
-            <a:ext cx="45720" cy="1051560"/>
+            <a:off x="777240" y="5888736"/>
+            <a:ext cx="45720" cy="749808"/>
           </a:xfrm>
           <a:prstGeom prst="rect">
             <a:avLst/>
@@ -17339,7 +17623,7 @@
         </p:nvSpPr>
         <p:spPr>
           <a:xfrm>
-            <a:off x="1033271" y="5632704"/>
+            <a:off x="1033271" y="6035040"/>
             <a:ext cx="10134295" cy="219456"/>
           </a:xfrm>
           <a:prstGeom prst="rect">
@@ -17365,7 +17649,7 @@
                 </a:solidFill>
                 <a:latin typeface="Segoe UI"/>
               </a:rPr>
-              <a:t>HONEST POSITION</a:t>
+              <a:t>WHAT WE SOLVE THAT THEY DO NOT</a:t>
             </a:r>
           </a:p>
         </p:txBody>
@@ -17378,8 +17662,8 @@
         </p:nvSpPr>
         <p:spPr>
           <a:xfrm>
-            <a:off x="1033271" y="5925312"/>
-            <a:ext cx="10134295" cy="484631"/>
+            <a:off x="1033271" y="6327648"/>
+            <a:ext cx="10134295" cy="182879"/>
           </a:xfrm>
           <a:prstGeom prst="rect">
             <a:avLst/>
@@ -17398,13 +17682,13 @@
               </a:lnSpc>
             </a:pPr>
             <a:r>
-              <a:rPr sz="1600" b="0" i="0">
+              <a:rPr sz="1400" b="0" i="0">
                 <a:solidFill>
                   <a:srgbClr val="141C1E"/>
                 </a:solidFill>
                 <a:latin typeface="Segoe UI"/>
               </a:rPr>
-              <a:t>We do not expect to exceed trained state-of-the-art detectors on absolute AUROC, and the paper makes no such claim.</a:t>
+              <a:t>Detection of anomalies nobody enumerated in advance — and two findings that transfer: injection point beats wording, and the benefit scales with scene diversity.</a:t>
             </a:r>
           </a:p>
         </p:txBody>
@@ -20118,7 +20402,7 @@
                 </a:solidFill>
                 <a:latin typeface="Segoe UI"/>
               </a:rPr>
-              <a:t>1 OF 2</a:t>
+              <a:t>1 OF 3</a:t>
             </a:r>
           </a:p>
         </p:txBody>
@@ -20672,7 +20956,7 @@
                 </a:solidFill>
                 <a:latin typeface="Segoe UI"/>
               </a:rPr>
-              <a:t>S. Ahn, Y. Jo, K. Lee, S. Kwon, I. Hong, S. Park, AnyAnomaly: Zero-shot customizable video anomaly detection with LVLM, arXiv preprint arXiv:2503.04504 (2025).</a:t>
+              <a:t>S. Ahn, Y. Jo, K. Lee, S. Kwon, I. Hong, S. Park, AnyAnomaly: Zero-shot customizable video anomaly detection with LVLM, in: Proc. IEEE/CVF Winter Conf. Appl. Comput. Vis. (WACV), 2026, pp. 3026–3035.</a:t>
             </a:r>
           </a:p>
         </p:txBody>
@@ -20865,102 +21149,6 @@
                 <a:latin typeface="Segoe UI"/>
               </a:rPr>
               <a:t>G. Wilson, D. J. Cook, A survey of unsupervised deep domain adaptation, ACM Comput. Surv. 51 (2020) 1–46.</a:t>
-            </a:r>
-          </a:p>
-        </p:txBody>
-      </p:sp>
-      <p:sp>
-        <p:nvSpPr>
-          <p:cNvPr id="20" name="TextBox 19"/>
-          <p:cNvSpPr txBox="1"/>
-          <p:nvPr/>
-        </p:nvSpPr>
-        <p:spPr>
-          <a:xfrm>
-            <a:off x="777240" y="5737859"/>
-            <a:ext cx="10637215" cy="274320"/>
-          </a:xfrm>
-          <a:prstGeom prst="rect">
-            <a:avLst/>
-          </a:prstGeom>
-          <a:noFill/>
-        </p:spPr>
-        <p:txBody>
-          <a:bodyPr wrap="square" lIns="0" rIns="0" tIns="0" bIns="0">
-            <a:spAutoFit/>
-          </a:bodyPr>
-          <a:lstStyle/>
-          <a:p>
-            <a:pPr>
-              <a:lnSpc>
-                <a:spcPct val="102000"/>
-              </a:lnSpc>
-            </a:pPr>
-            <a:r>
-              <a:rPr sz="900" b="1">
-                <a:solidFill>
-                  <a:srgbClr val="141C1E"/>
-                </a:solidFill>
-                <a:latin typeface="Segoe UI"/>
-              </a:rPr>
-              <a:t>[14]  </a:t>
-            </a:r>
-            <a:r>
-              <a:rPr sz="900">
-                <a:solidFill>
-                  <a:srgbClr val="141C1E"/>
-                </a:solidFill>
-                <a:latin typeface="Segoe UI"/>
-              </a:rPr>
-              <a:t>X. Liu, C. Yoo, F. Xing, H. Oh, G. El Fakhri, J.-W. Kang, J. Woo, Deep unsupervised domain adaptation: A review of recent advances and perspectives, APSIPA Trans. Signal Inf. Process. 11 (2022). ArXiv:2208.07422.</a:t>
-            </a:r>
-          </a:p>
-        </p:txBody>
-      </p:sp>
-      <p:sp>
-        <p:nvSpPr>
-          <p:cNvPr id="21" name="TextBox 20"/>
-          <p:cNvSpPr txBox="1"/>
-          <p:nvPr/>
-        </p:nvSpPr>
-        <p:spPr>
-          <a:xfrm>
-            <a:off x="777240" y="6044183"/>
-            <a:ext cx="10637215" cy="274320"/>
-          </a:xfrm>
-          <a:prstGeom prst="rect">
-            <a:avLst/>
-          </a:prstGeom>
-          <a:noFill/>
-        </p:spPr>
-        <p:txBody>
-          <a:bodyPr wrap="square" lIns="0" rIns="0" tIns="0" bIns="0">
-            <a:spAutoFit/>
-          </a:bodyPr>
-          <a:lstStyle/>
-          <a:p>
-            <a:pPr>
-              <a:lnSpc>
-                <a:spcPct val="102000"/>
-              </a:lnSpc>
-            </a:pPr>
-            <a:r>
-              <a:rPr sz="900" b="1">
-                <a:solidFill>
-                  <a:srgbClr val="141C1E"/>
-                </a:solidFill>
-                <a:latin typeface="Segoe UI"/>
-              </a:rPr>
-              <a:t>[15]  </a:t>
-            </a:r>
-            <a:r>
-              <a:rPr sz="900">
-                <a:solidFill>
-                  <a:srgbClr val="141C1E"/>
-                </a:solidFill>
-                <a:latin typeface="Segoe UI"/>
-              </a:rPr>
-              <a:t>P. Singhal, R. Walambe, S. Ramanna, K. Kotecha, Domain adaptation: Challenges, methods, datasets, and applications, IEEE Access 11 (2023) 6973–7020.</a:t>
             </a:r>
           </a:p>
         </p:txBody>
@@ -21061,7 +21249,7 @@
                 </a:solidFill>
                 <a:latin typeface="Segoe UI"/>
               </a:rPr>
-              <a:t>2 OF 2</a:t>
+              <a:t>2 OF 3</a:t>
             </a:r>
           </a:p>
         </p:txBody>
@@ -21222,7 +21410,7 @@
                 </a:solidFill>
                 <a:latin typeface="Segoe UI"/>
               </a:rPr>
-              <a:t>[16]  </a:t>
+              <a:t>[14]  </a:t>
             </a:r>
             <a:r>
               <a:rPr sz="900">
@@ -21231,7 +21419,7 @@
                 </a:solidFill>
                 <a:latin typeface="Segoe UI"/>
               </a:rPr>
-              <a:t>L. Fan, F. Liu, C. Chen, Domain adaptation of large language models for geotechnical applications, Solid Earth Sci. (2026). Art. no. 100285.</a:t>
+              <a:t>X. Liu, C. Yoo, F. Xing, H. Oh, G. El Fakhri, J.-W. Kang, J. Woo, Deep unsupervised domain adaptation: A review of recent advances and perspectives, APSIPA Trans. Signal Inf. Process. 11 (2022). ArXiv:2208.07422.</a:t>
             </a:r>
           </a:p>
         </p:txBody>
@@ -21270,7 +21458,7 @@
                 </a:solidFill>
                 <a:latin typeface="Segoe UI"/>
               </a:rPr>
-              <a:t>[17]  </a:t>
+              <a:t>[15]  </a:t>
             </a:r>
             <a:r>
               <a:rPr sz="900">
@@ -21279,7 +21467,7 @@
                 </a:solidFill>
                 <a:latin typeface="Segoe UI"/>
               </a:rPr>
-              <a:t>D. Guo, Y. Fu, S. Li, Ada-VAD: Domain adaptable video anomaly detection, in: Proc. SIAM Int. Conf. Data Min. (SDM), 2024, pp. 634–642.</a:t>
+              <a:t>P. Singhal, R. Walambe, S. Ramanna, K. Kotecha, Domain adaptation: Challenges, methods, datasets, and applications, IEEE Access 11 (2023) 6973–7020.</a:t>
             </a:r>
           </a:p>
         </p:txBody>
@@ -21318,7 +21506,7 @@
                 </a:solidFill>
                 <a:latin typeface="Segoe UI"/>
               </a:rPr>
-              <a:t>[18]  </a:t>
+              <a:t>[16]  </a:t>
             </a:r>
             <a:r>
               <a:rPr sz="900">
@@ -21327,7 +21515,7 @@
                 </a:solidFill>
                 <a:latin typeface="Segoe UI"/>
               </a:rPr>
-              <a:t>Y. Lu, F. Yu, M. K. K. Reddy, Y. Wang, Few-shot scene-adaptive anomaly detection, in: Proc. Eur. Conf. Comput. Vis. (ECCV), 2020, pp. 125–141.</a:t>
+              <a:t>L. Fan, F. Liu, C. Chen, Domain adaptation of large language models for geotechnical applications, Solid Earth Sci. (2026). Art. no. 100285.</a:t>
             </a:r>
           </a:p>
         </p:txBody>
@@ -21366,7 +21554,7 @@
                 </a:solidFill>
                 <a:latin typeface="Segoe UI"/>
               </a:rPr>
-              <a:t>[19]  </a:t>
+              <a:t>[17]  </a:t>
             </a:r>
             <a:r>
               <a:rPr sz="900">
@@ -21375,7 +21563,7 @@
                 </a:solidFill>
                 <a:latin typeface="Segoe UI"/>
               </a:rPr>
-              <a:t>A. Aich, K.-C. Peng, A. K. Roy-Chowdhury, Cross-domain video anomaly detection without target domain adaptation, in: Proc. IEEE/CVF Winter Conf. Appl. Comput. Vis. (WACV), 2023, pp. 2578–2590.</a:t>
+              <a:t>D. Guo, Y. Fu, S. Li, Ada-VAD: Domain adaptable video anomaly detection, in: Proc. SIAM Int. Conf. Data Min. (SDM), 2024, pp. 634–642.</a:t>
             </a:r>
           </a:p>
         </p:txBody>
@@ -21414,7 +21602,7 @@
                 </a:solidFill>
                 <a:latin typeface="Segoe UI"/>
               </a:rPr>
-              <a:t>[20]  </a:t>
+              <a:t>[18]  </a:t>
             </a:r>
             <a:r>
               <a:rPr sz="900">
@@ -21423,7 +21611,7 @@
                 </a:solidFill>
                 <a:latin typeface="Segoe UI"/>
               </a:rPr>
-              <a:t>W. M. Kouw, M. Loog, An introduction to domain adaptation and transfer learning, arXiv preprint arXiv:1812.11806 (2018).</a:t>
+              <a:t>Y. Lu, F. Yu, M. K. K. Reddy, Y. Wang, Few-shot scene-adaptive anomaly detection, in: Proc. Eur. Conf. Comput. Vis. (ECCV), 2020, pp. 125–141.</a:t>
             </a:r>
           </a:p>
         </p:txBody>
@@ -21462,7 +21650,7 @@
                 </a:solidFill>
                 <a:latin typeface="Segoe UI"/>
               </a:rPr>
-              <a:t>[21]  </a:t>
+              <a:t>[19]  </a:t>
             </a:r>
             <a:r>
               <a:rPr sz="900">
@@ -21471,7 +21659,7 @@
                 </a:solidFill>
                 <a:latin typeface="Segoe UI"/>
               </a:rPr>
-              <a:t>W. Liu, W. Luo, D. Lian, S. Gao, Future frame prediction for anomaly detection — A new baseline, in: Proc. IEEE/CVF Conf. Comput. Vis. Pattern Recognit. (CVPR), 2018, pp. 6536–6545.</a:t>
+              <a:t>A. Aich, K.-C. Peng, A. K. Roy-Chowdhury, Cross-domain video anomaly detection without target domain adaptation, in: Proc. IEEE/CVF Winter Conf. Appl. Comput. Vis. (WACV), 2023, pp. 2578–2590.</a:t>
             </a:r>
           </a:p>
         </p:txBody>
@@ -21510,7 +21698,7 @@
                 </a:solidFill>
                 <a:latin typeface="Segoe UI"/>
               </a:rPr>
-              <a:t>[22]  </a:t>
+              <a:t>[20]  </a:t>
             </a:r>
             <a:r>
               <a:rPr sz="900">
@@ -21519,7 +21707,7 @@
                 </a:solidFill>
                 <a:latin typeface="Segoe UI"/>
               </a:rPr>
-              <a:t>A. Dosovitskiy, L. Beyer, A. Kolesnikov, D. Weissenborn, X. Zhai, T. Unterthiner, M. Dehghani, M. Minderer, G. Heigold, S. Gelly, J. Uszkoreit, N. Houlsby, An image is worth 16x16 words: Transformers for image recognition at scale, in: Proc. Int. Conf. Learn. Represent. (ICLR), 2021.</a:t>
+              <a:t>W. M. Kouw, M. Loog, An introduction to domain adaptation and transfer learning, arXiv preprint arXiv:1812.11806 (2018).</a:t>
             </a:r>
           </a:p>
         </p:txBody>
@@ -21558,7 +21746,7 @@
                 </a:solidFill>
                 <a:latin typeface="Segoe UI"/>
               </a:rPr>
-              <a:t>[23]  </a:t>
+              <a:t>[21]  </a:t>
             </a:r>
             <a:r>
               <a:rPr sz="900">
@@ -21567,7 +21755,7 @@
                 </a:solidFill>
                 <a:latin typeface="Segoe UI"/>
               </a:rPr>
-              <a:t>A. Vaswani, N. Shazeer, N. Parmar, J. Uszkoreit, L. Jones, A. N. Gomez, L. Kaiser, I. Polosukhin, Attention is all you need, in: Adv. Neural Inf. Process. Syst. (NeurIPS), 2017, pp. 5998–6008.</a:t>
+              <a:t>W. Liu, W. Luo, D. Lian, S. Gao, Future frame prediction for anomaly detection — A new baseline, in: Proc. IEEE/CVF Conf. Comput. Vis. Pattern Recognit. (CVPR), 2018, pp. 6536–6545.</a:t>
             </a:r>
           </a:p>
         </p:txBody>
@@ -21606,7 +21794,7 @@
                 </a:solidFill>
                 <a:latin typeface="Segoe UI"/>
               </a:rPr>
-              <a:t>[24]  </a:t>
+              <a:t>[22]  </a:t>
             </a:r>
             <a:r>
               <a:rPr sz="900">
@@ -21615,7 +21803,7 @@
                 </a:solidFill>
                 <a:latin typeface="Segoe UI"/>
               </a:rPr>
-              <a:t>H. Liu, C. Li, Q. Wu, Y. J. Lee, Visual instruction tuning, in: Adv. Neural Inf. Process. Syst. (NeurIPS), 2023, pp. 34892–34916.</a:t>
+              <a:t>A. Dosovitskiy, L. Beyer, A. Kolesnikov, D. Weissenborn, X. Zhai, T. Unterthiner, M. Dehghani, M. Minderer, G. Heigold, S. Gelly, J. Uszkoreit, N. Houlsby, An image is worth 16x16 words: Transformers for image recognition at scale, in: Proc. Int. Conf. Learn. Represent. (ICLR), 2021.</a:t>
             </a:r>
           </a:p>
         </p:txBody>
@@ -21654,7 +21842,7 @@
                 </a:solidFill>
                 <a:latin typeface="Segoe UI"/>
               </a:rPr>
-              <a:t>[25]  </a:t>
+              <a:t>[23]  </a:t>
             </a:r>
             <a:r>
               <a:rPr sz="900">
@@ -21663,7 +21851,7 @@
                 </a:solidFill>
                 <a:latin typeface="Segoe UI"/>
               </a:rPr>
-              <a:t>T. Dettmers, A. Pagnoni, A. Holtzman, L. Zettlemoyer, QLoRA: Efficient finetuning of quantized LLMs, in: Adv. Neural Inf. Process. Syst. (NeurIPS), 2023, pp. 10088–10115.</a:t>
+              <a:t>A. Vaswani, N. Shazeer, N. Parmar, J. Uszkoreit, L. Jones, A. N. Gomez, L. Kaiser, I. Polosukhin, Attention is all you need, in: Adv. Neural Inf. Process. Syst. (NeurIPS), 2017, pp. 5998–6008.</a:t>
             </a:r>
           </a:p>
         </p:txBody>
@@ -21702,7 +21890,7 @@
                 </a:solidFill>
                 <a:latin typeface="Segoe UI"/>
               </a:rPr>
-              <a:t>[26]  </a:t>
+              <a:t>[24]  </a:t>
             </a:r>
             <a:r>
               <a:rPr sz="900">
@@ -21711,7 +21899,7 @@
                 </a:solidFill>
                 <a:latin typeface="Segoe UI"/>
               </a:rPr>
-              <a:t>C. Lu, J. Shi, J. Jia, Abnormal event detection at 150 FPS in MATLAB, in: Proc. IEEE Int. Conf. Comput. Vis. (ICCV), 2013, pp. 2720–2727.</a:t>
+              <a:t>H. Liu, C. Li, Q. Wu, Y. J. Lee, Visual instruction tuning, in: Adv. Neural Inf. Process. Syst. (NeurIPS), 2023, pp. 34892–34916.</a:t>
             </a:r>
           </a:p>
         </p:txBody>
@@ -21750,7 +21938,7 @@
                 </a:solidFill>
                 <a:latin typeface="Segoe UI"/>
               </a:rPr>
-              <a:t>[27]  </a:t>
+              <a:t>[25]  </a:t>
             </a:r>
             <a:r>
               <a:rPr sz="900">
@@ -21759,7 +21947,7 @@
                 </a:solidFill>
                 <a:latin typeface="Segoe UI"/>
               </a:rPr>
-              <a:t>T. Fawcett, An introduction to ROC analysis, Pattern Recognit. Lett. 27 (2006) 861–874.</a:t>
+              <a:t>T. Dettmers, A. Pagnoni, A. Holtzman, L. Zettlemoyer, QLoRA: Efficient finetuning of quantized LLMs, in: Adv. Neural Inf. Process. Syst. (NeurIPS), 2023, pp. 10088–10115.</a:t>
             </a:r>
           </a:p>
         </p:txBody>
@@ -21798,7 +21986,7 @@
                 </a:solidFill>
                 <a:latin typeface="Segoe UI"/>
               </a:rPr>
-              <a:t>[28]  </a:t>
+              <a:t>[26]  </a:t>
             </a:r>
             <a:r>
               <a:rPr sz="900">
@@ -21807,103 +21995,7 @@
                 </a:solidFill>
                 <a:latin typeface="Segoe UI"/>
               </a:rPr>
-              <a:t>A. P. Bradley, The use of the area under the ROC curve in the evaluation of machine learning algorithms, Pattern Recognit. 30 (1997) 1145–1159.</a:t>
-            </a:r>
-          </a:p>
-        </p:txBody>
-      </p:sp>
-      <p:sp>
-        <p:nvSpPr>
-          <p:cNvPr id="20" name="TextBox 19"/>
-          <p:cNvSpPr txBox="1"/>
-          <p:nvPr/>
-        </p:nvSpPr>
-        <p:spPr>
-          <a:xfrm>
-            <a:off x="777240" y="5737859"/>
-            <a:ext cx="10637215" cy="274320"/>
-          </a:xfrm>
-          <a:prstGeom prst="rect">
-            <a:avLst/>
-          </a:prstGeom>
-          <a:noFill/>
-        </p:spPr>
-        <p:txBody>
-          <a:bodyPr wrap="square" lIns="0" rIns="0" tIns="0" bIns="0">
-            <a:spAutoFit/>
-          </a:bodyPr>
-          <a:lstStyle/>
-          <a:p>
-            <a:pPr>
-              <a:lnSpc>
-                <a:spcPct val="102000"/>
-              </a:lnSpc>
-            </a:pPr>
-            <a:r>
-              <a:rPr sz="900" b="1">
-                <a:solidFill>
-                  <a:srgbClr val="141C1E"/>
-                </a:solidFill>
-                <a:latin typeface="Segoe UI"/>
-              </a:rPr>
-              <a:t>[29]  </a:t>
-            </a:r>
-            <a:r>
-              <a:rPr sz="900">
-                <a:solidFill>
-                  <a:srgbClr val="141C1E"/>
-                </a:solidFill>
-                <a:latin typeface="Segoe UI"/>
-              </a:rPr>
-              <a:t>J. Davis, M. Goadrich, The relationship between precision-recall and ROC curves, in: Proc. Int. Conf. Mach. Learn. (ICML), 2006, pp. 233–240.</a:t>
-            </a:r>
-          </a:p>
-        </p:txBody>
-      </p:sp>
-      <p:sp>
-        <p:nvSpPr>
-          <p:cNvPr id="21" name="TextBox 20"/>
-          <p:cNvSpPr txBox="1"/>
-          <p:nvPr/>
-        </p:nvSpPr>
-        <p:spPr>
-          <a:xfrm>
-            <a:off x="777240" y="6044183"/>
-            <a:ext cx="10637215" cy="274320"/>
-          </a:xfrm>
-          <a:prstGeom prst="rect">
-            <a:avLst/>
-          </a:prstGeom>
-          <a:noFill/>
-        </p:spPr>
-        <p:txBody>
-          <a:bodyPr wrap="square" lIns="0" rIns="0" tIns="0" bIns="0">
-            <a:spAutoFit/>
-          </a:bodyPr>
-          <a:lstStyle/>
-          <a:p>
-            <a:pPr>
-              <a:lnSpc>
-                <a:spcPct val="102000"/>
-              </a:lnSpc>
-            </a:pPr>
-            <a:r>
-              <a:rPr sz="900" b="1">
-                <a:solidFill>
-                  <a:srgbClr val="141C1E"/>
-                </a:solidFill>
-                <a:latin typeface="Segoe UI"/>
-              </a:rPr>
-              <a:t>[30]  </a:t>
-            </a:r>
-            <a:r>
-              <a:rPr sz="900">
-                <a:solidFill>
-                  <a:srgbClr val="141C1E"/>
-                </a:solidFill>
-                <a:latin typeface="Segoe UI"/>
-              </a:rPr>
-              <a:t>B. Schölkopf, J. C. Platt, J. Shawe-Taylor, A. J. Smola, R. C. Williamson, Estimating the support of a high-dimensional distribution, Neural Comput. 13 (2001) 1443–1471.</a:t>
+              <a:t>C. Lu, J. Shi, J. Jia, Abnormal event detection at 150 FPS in MATLAB, in: Proc. IEEE Int. Conf. Comput. Vis. (ICCV), 2013, pp. 2720–2727.</a:t>
             </a:r>
           </a:p>
         </p:txBody>
@@ -22611,6 +22703,757 @@
                 <a:latin typeface="Segoe UI"/>
               </a:rPr>
               <a:t>Fair for object recognition — a cat is a cat everywhere. But anomaly detection is built on concept shift.</a:t>
+            </a:r>
+          </a:p>
+        </p:txBody>
+      </p:sp>
+    </p:spTree>
+  </p:cSld>
+  <p:clrMapOvr>
+    <a:masterClrMapping/>
+  </p:clrMapOvr>
+</p:sld>
+</file>
+
+<file path=ppt/slides/slide30.xml><?xml version="1.0" encoding="utf-8"?>
+<p:sld xmlns:a="http://schemas.openxmlformats.org/drawingml/2006/main" xmlns:p="http://schemas.openxmlformats.org/presentationml/2006/main" xmlns:r="http://schemas.openxmlformats.org/officeDocument/2006/relationships">
+  <p:cSld>
+    <p:spTree>
+      <p:nvGrpSpPr>
+        <p:cNvPr id="1" name=""/>
+        <p:cNvGrpSpPr/>
+        <p:nvPr/>
+      </p:nvGrpSpPr>
+      <p:grpSpPr/>
+      <p:sp>
+        <p:nvSpPr>
+          <p:cNvPr id="2" name="Rectangle 1"/>
+          <p:cNvSpPr/>
+          <p:nvPr/>
+        </p:nvSpPr>
+        <p:spPr>
+          <a:xfrm>
+            <a:off x="0" y="0"/>
+            <a:ext cx="12191695" cy="6858000"/>
+          </a:xfrm>
+          <a:prstGeom prst="rect">
+            <a:avLst/>
+          </a:prstGeom>
+          <a:solidFill>
+            <a:srgbClr val="FFFFFF"/>
+          </a:solidFill>
+          <a:ln>
+            <a:noFill/>
+          </a:ln>
+          <a:effectLst/>
+        </p:spPr>
+        <p:style>
+          <a:lnRef idx="1">
+            <a:schemeClr val="accent1"/>
+          </a:lnRef>
+          <a:fillRef idx="3">
+            <a:schemeClr val="accent1"/>
+          </a:fillRef>
+          <a:effectRef idx="2">
+            <a:schemeClr val="accent1"/>
+          </a:effectRef>
+          <a:fontRef idx="minor">
+            <a:schemeClr val="lt1"/>
+          </a:fontRef>
+        </p:style>
+        <p:txBody>
+          <a:bodyPr rtlCol="0" anchor="ctr"/>
+          <a:lstStyle/>
+          <a:p>
+            <a:pPr algn="ctr"/>
+          </a:p>
+        </p:txBody>
+      </p:sp>
+      <p:sp>
+        <p:nvSpPr>
+          <p:cNvPr id="3" name="TextBox 2"/>
+          <p:cNvSpPr txBox="1"/>
+          <p:nvPr/>
+        </p:nvSpPr>
+        <p:spPr>
+          <a:xfrm>
+            <a:off x="777240" y="475488"/>
+            <a:ext cx="10637215" cy="228600"/>
+          </a:xfrm>
+          <a:prstGeom prst="rect">
+            <a:avLst/>
+          </a:prstGeom>
+          <a:noFill/>
+        </p:spPr>
+        <p:txBody>
+          <a:bodyPr wrap="square" lIns="0" rIns="0" tIns="0" bIns="0">
+            <a:spAutoFit/>
+          </a:bodyPr>
+          <a:lstStyle/>
+          <a:p>
+            <a:pPr algn="l">
+              <a:lnSpc>
+                <a:spcPct val="100000"/>
+              </a:lnSpc>
+            </a:pPr>
+            <a:r>
+              <a:rPr sz="1100" b="1" i="0">
+                <a:solidFill>
+                  <a:srgbClr val="0D6B67"/>
+                </a:solidFill>
+                <a:latin typeface="Segoe UI"/>
+              </a:rPr>
+              <a:t>3 OF 3</a:t>
+            </a:r>
+          </a:p>
+        </p:txBody>
+      </p:sp>
+      <p:sp>
+        <p:nvSpPr>
+          <p:cNvPr id="4" name="TextBox 3"/>
+          <p:cNvSpPr txBox="1"/>
+          <p:nvPr/>
+        </p:nvSpPr>
+        <p:spPr>
+          <a:xfrm>
+            <a:off x="777240" y="749808"/>
+            <a:ext cx="10637215" cy="548640"/>
+          </a:xfrm>
+          <a:prstGeom prst="rect">
+            <a:avLst/>
+          </a:prstGeom>
+          <a:noFill/>
+        </p:spPr>
+        <p:txBody>
+          <a:bodyPr wrap="square" lIns="0" rIns="0" tIns="0" bIns="0">
+            <a:spAutoFit/>
+          </a:bodyPr>
+          <a:lstStyle/>
+          <a:p>
+            <a:pPr algn="l">
+              <a:lnSpc>
+                <a:spcPct val="100000"/>
+              </a:lnSpc>
+            </a:pPr>
+            <a:r>
+              <a:rPr sz="2700" b="1" i="0">
+                <a:solidFill>
+                  <a:srgbClr val="141C1E"/>
+                </a:solidFill>
+                <a:latin typeface="Segoe UI"/>
+              </a:rPr>
+              <a:t>References</a:t>
+            </a:r>
+          </a:p>
+        </p:txBody>
+      </p:sp>
+      <p:sp>
+        <p:nvSpPr>
+          <p:cNvPr id="5" name="Rectangle 4"/>
+          <p:cNvSpPr/>
+          <p:nvPr/>
+        </p:nvSpPr>
+        <p:spPr>
+          <a:xfrm>
+            <a:off x="777240" y="1408176"/>
+            <a:ext cx="1371600" cy="32004"/>
+          </a:xfrm>
+          <a:prstGeom prst="rect">
+            <a:avLst/>
+          </a:prstGeom>
+          <a:solidFill>
+            <a:srgbClr val="0D6B67"/>
+          </a:solidFill>
+          <a:ln>
+            <a:noFill/>
+          </a:ln>
+          <a:effectLst/>
+        </p:spPr>
+        <p:style>
+          <a:lnRef idx="1">
+            <a:schemeClr val="accent1"/>
+          </a:lnRef>
+          <a:fillRef idx="3">
+            <a:schemeClr val="accent1"/>
+          </a:fillRef>
+          <a:effectRef idx="2">
+            <a:schemeClr val="accent1"/>
+          </a:effectRef>
+          <a:fontRef idx="minor">
+            <a:schemeClr val="lt1"/>
+          </a:fontRef>
+        </p:style>
+        <p:txBody>
+          <a:bodyPr rtlCol="0" anchor="ctr"/>
+          <a:lstStyle/>
+          <a:p>
+            <a:pPr algn="ctr"/>
+          </a:p>
+        </p:txBody>
+      </p:sp>
+      <p:sp>
+        <p:nvSpPr>
+          <p:cNvPr id="6" name="TextBox 5"/>
+          <p:cNvSpPr txBox="1"/>
+          <p:nvPr/>
+        </p:nvSpPr>
+        <p:spPr>
+          <a:xfrm>
+            <a:off x="10865815" y="6382512"/>
+            <a:ext cx="548640" cy="228600"/>
+          </a:xfrm>
+          <a:prstGeom prst="rect">
+            <a:avLst/>
+          </a:prstGeom>
+          <a:noFill/>
+        </p:spPr>
+        <p:txBody>
+          <a:bodyPr wrap="square" lIns="0" rIns="0" tIns="0" bIns="0">
+            <a:spAutoFit/>
+          </a:bodyPr>
+          <a:lstStyle/>
+          <a:p>
+            <a:pPr algn="r">
+              <a:lnSpc>
+                <a:spcPct val="100000"/>
+              </a:lnSpc>
+            </a:pPr>
+            <a:r>
+              <a:rPr sz="1000" b="0" i="0">
+                <a:solidFill>
+                  <a:srgbClr val="617274"/>
+                </a:solidFill>
+                <a:latin typeface="Segoe UI"/>
+              </a:rPr>
+              <a:t>29</a:t>
+            </a:r>
+          </a:p>
+        </p:txBody>
+      </p:sp>
+      <p:sp>
+        <p:nvSpPr>
+          <p:cNvPr id="7" name="TextBox 6"/>
+          <p:cNvSpPr txBox="1"/>
+          <p:nvPr/>
+        </p:nvSpPr>
+        <p:spPr>
+          <a:xfrm>
+            <a:off x="777240" y="1755648"/>
+            <a:ext cx="10637215" cy="274320"/>
+          </a:xfrm>
+          <a:prstGeom prst="rect">
+            <a:avLst/>
+          </a:prstGeom>
+          <a:noFill/>
+        </p:spPr>
+        <p:txBody>
+          <a:bodyPr wrap="square" lIns="0" rIns="0" tIns="0" bIns="0">
+            <a:spAutoFit/>
+          </a:bodyPr>
+          <a:lstStyle/>
+          <a:p>
+            <a:pPr>
+              <a:lnSpc>
+                <a:spcPct val="102000"/>
+              </a:lnSpc>
+            </a:pPr>
+            <a:r>
+              <a:rPr sz="900" b="1">
+                <a:solidFill>
+                  <a:srgbClr val="141C1E"/>
+                </a:solidFill>
+                <a:latin typeface="Segoe UI"/>
+              </a:rPr>
+              <a:t>[27]  </a:t>
+            </a:r>
+            <a:r>
+              <a:rPr sz="900">
+                <a:solidFill>
+                  <a:srgbClr val="141C1E"/>
+                </a:solidFill>
+                <a:latin typeface="Segoe UI"/>
+              </a:rPr>
+              <a:t>T. Fawcett, An introduction to ROC analysis, Pattern Recognit. Lett. 27 (2006) 861–874.</a:t>
+            </a:r>
+          </a:p>
+        </p:txBody>
+      </p:sp>
+      <p:sp>
+        <p:nvSpPr>
+          <p:cNvPr id="8" name="TextBox 7"/>
+          <p:cNvSpPr txBox="1"/>
+          <p:nvPr/>
+        </p:nvSpPr>
+        <p:spPr>
+          <a:xfrm>
+            <a:off x="777240" y="2061972"/>
+            <a:ext cx="10637215" cy="274320"/>
+          </a:xfrm>
+          <a:prstGeom prst="rect">
+            <a:avLst/>
+          </a:prstGeom>
+          <a:noFill/>
+        </p:spPr>
+        <p:txBody>
+          <a:bodyPr wrap="square" lIns="0" rIns="0" tIns="0" bIns="0">
+            <a:spAutoFit/>
+          </a:bodyPr>
+          <a:lstStyle/>
+          <a:p>
+            <a:pPr>
+              <a:lnSpc>
+                <a:spcPct val="102000"/>
+              </a:lnSpc>
+            </a:pPr>
+            <a:r>
+              <a:rPr sz="900" b="1">
+                <a:solidFill>
+                  <a:srgbClr val="141C1E"/>
+                </a:solidFill>
+                <a:latin typeface="Segoe UI"/>
+              </a:rPr>
+              <a:t>[28]  </a:t>
+            </a:r>
+            <a:r>
+              <a:rPr sz="900">
+                <a:solidFill>
+                  <a:srgbClr val="141C1E"/>
+                </a:solidFill>
+                <a:latin typeface="Segoe UI"/>
+              </a:rPr>
+              <a:t>A. P. Bradley, The use of the area under the ROC curve in the evaluation of machine learning algorithms, Pattern Recognit. 30 (1997) 1145–1159.</a:t>
+            </a:r>
+          </a:p>
+        </p:txBody>
+      </p:sp>
+      <p:sp>
+        <p:nvSpPr>
+          <p:cNvPr id="9" name="TextBox 8"/>
+          <p:cNvSpPr txBox="1"/>
+          <p:nvPr/>
+        </p:nvSpPr>
+        <p:spPr>
+          <a:xfrm>
+            <a:off x="777240" y="2368296"/>
+            <a:ext cx="10637215" cy="274320"/>
+          </a:xfrm>
+          <a:prstGeom prst="rect">
+            <a:avLst/>
+          </a:prstGeom>
+          <a:noFill/>
+        </p:spPr>
+        <p:txBody>
+          <a:bodyPr wrap="square" lIns="0" rIns="0" tIns="0" bIns="0">
+            <a:spAutoFit/>
+          </a:bodyPr>
+          <a:lstStyle/>
+          <a:p>
+            <a:pPr>
+              <a:lnSpc>
+                <a:spcPct val="102000"/>
+              </a:lnSpc>
+            </a:pPr>
+            <a:r>
+              <a:rPr sz="900" b="1">
+                <a:solidFill>
+                  <a:srgbClr val="141C1E"/>
+                </a:solidFill>
+                <a:latin typeface="Segoe UI"/>
+              </a:rPr>
+              <a:t>[29]  </a:t>
+            </a:r>
+            <a:r>
+              <a:rPr sz="900">
+                <a:solidFill>
+                  <a:srgbClr val="141C1E"/>
+                </a:solidFill>
+                <a:latin typeface="Segoe UI"/>
+              </a:rPr>
+              <a:t>J. Davis, M. Goadrich, The relationship between precision-recall and ROC curves, in: Proc. Int. Conf. Mach. Learn. (ICML), 2006, pp. 233–240.</a:t>
+            </a:r>
+          </a:p>
+        </p:txBody>
+      </p:sp>
+      <p:sp>
+        <p:nvSpPr>
+          <p:cNvPr id="10" name="TextBox 9"/>
+          <p:cNvSpPr txBox="1"/>
+          <p:nvPr/>
+        </p:nvSpPr>
+        <p:spPr>
+          <a:xfrm>
+            <a:off x="777240" y="2674620"/>
+            <a:ext cx="10637215" cy="274320"/>
+          </a:xfrm>
+          <a:prstGeom prst="rect">
+            <a:avLst/>
+          </a:prstGeom>
+          <a:noFill/>
+        </p:spPr>
+        <p:txBody>
+          <a:bodyPr wrap="square" lIns="0" rIns="0" tIns="0" bIns="0">
+            <a:spAutoFit/>
+          </a:bodyPr>
+          <a:lstStyle/>
+          <a:p>
+            <a:pPr>
+              <a:lnSpc>
+                <a:spcPct val="102000"/>
+              </a:lnSpc>
+            </a:pPr>
+            <a:r>
+              <a:rPr sz="900" b="1">
+                <a:solidFill>
+                  <a:srgbClr val="141C1E"/>
+                </a:solidFill>
+                <a:latin typeface="Segoe UI"/>
+              </a:rPr>
+              <a:t>[30]  </a:t>
+            </a:r>
+            <a:r>
+              <a:rPr sz="900">
+                <a:solidFill>
+                  <a:srgbClr val="141C1E"/>
+                </a:solidFill>
+                <a:latin typeface="Segoe UI"/>
+              </a:rPr>
+              <a:t>B. Schölkopf, J. C. Platt, J. Shawe-Taylor, A. J. Smola, R. C. Williamson, Estimating the support of a high-dimensional distribution, Neural Comput. 13 (2001) 1443–1471.</a:t>
+            </a:r>
+          </a:p>
+        </p:txBody>
+      </p:sp>
+      <p:sp>
+        <p:nvSpPr>
+          <p:cNvPr id="11" name="TextBox 10"/>
+          <p:cNvSpPr txBox="1"/>
+          <p:nvPr/>
+        </p:nvSpPr>
+        <p:spPr>
+          <a:xfrm>
+            <a:off x="777240" y="2980944"/>
+            <a:ext cx="10637215" cy="274320"/>
+          </a:xfrm>
+          <a:prstGeom prst="rect">
+            <a:avLst/>
+          </a:prstGeom>
+          <a:noFill/>
+        </p:spPr>
+        <p:txBody>
+          <a:bodyPr wrap="square" lIns="0" rIns="0" tIns="0" bIns="0">
+            <a:spAutoFit/>
+          </a:bodyPr>
+          <a:lstStyle/>
+          <a:p>
+            <a:pPr>
+              <a:lnSpc>
+                <a:spcPct val="102000"/>
+              </a:lnSpc>
+            </a:pPr>
+            <a:r>
+              <a:rPr sz="900" b="1">
+                <a:solidFill>
+                  <a:srgbClr val="141C1E"/>
+                </a:solidFill>
+                <a:latin typeface="Segoe UI"/>
+              </a:rPr>
+              <a:t>[31]  </a:t>
+            </a:r>
+            <a:r>
+              <a:rPr sz="900">
+                <a:solidFill>
+                  <a:srgbClr val="141C1E"/>
+                </a:solidFill>
+                <a:latin typeface="Segoe UI"/>
+              </a:rPr>
+              <a:t>Y. Tian, G. Pang, Y. Chen, R. Singh, J. W. Verjans, G. Carneiro, Weakly-supervised video anomaly detection with robust temporal feature magnitude learning, in: Proc. IEEE/CVF Int. Conf. Comput. Vis. (ICCV), 2021, pp. 4975–4986.</a:t>
+            </a:r>
+          </a:p>
+        </p:txBody>
+      </p:sp>
+      <p:sp>
+        <p:nvSpPr>
+          <p:cNvPr id="12" name="TextBox 11"/>
+          <p:cNvSpPr txBox="1"/>
+          <p:nvPr/>
+        </p:nvSpPr>
+        <p:spPr>
+          <a:xfrm>
+            <a:off x="777240" y="3287268"/>
+            <a:ext cx="10637215" cy="274320"/>
+          </a:xfrm>
+          <a:prstGeom prst="rect">
+            <a:avLst/>
+          </a:prstGeom>
+          <a:noFill/>
+        </p:spPr>
+        <p:txBody>
+          <a:bodyPr wrap="square" lIns="0" rIns="0" tIns="0" bIns="0">
+            <a:spAutoFit/>
+          </a:bodyPr>
+          <a:lstStyle/>
+          <a:p>
+            <a:pPr>
+              <a:lnSpc>
+                <a:spcPct val="102000"/>
+              </a:lnSpc>
+            </a:pPr>
+            <a:r>
+              <a:rPr sz="900" b="1">
+                <a:solidFill>
+                  <a:srgbClr val="141C1E"/>
+                </a:solidFill>
+                <a:latin typeface="Segoe UI"/>
+              </a:rPr>
+              <a:t>[32]  </a:t>
+            </a:r>
+            <a:r>
+              <a:rPr sz="900">
+                <a:solidFill>
+                  <a:srgbClr val="141C1E"/>
+                </a:solidFill>
+                <a:latin typeface="Segoe UI"/>
+              </a:rPr>
+              <a:t>D. Gong, L. Liu, V. Le, B. Saha, M. R. Mansour, S. Venkatesh, A. van den Hengel, Memorizing normality to detect anomaly: Memory-augmented deep autoencoder for unsupervised anomaly detection, in: Proc. IEEE/CVF Int. Conf. Comput. Vis. (ICCV), 2019, pp. 1705–1714.</a:t>
+            </a:r>
+          </a:p>
+        </p:txBody>
+      </p:sp>
+      <p:sp>
+        <p:nvSpPr>
+          <p:cNvPr id="13" name="TextBox 12"/>
+          <p:cNvSpPr txBox="1"/>
+          <p:nvPr/>
+        </p:nvSpPr>
+        <p:spPr>
+          <a:xfrm>
+            <a:off x="777240" y="3593591"/>
+            <a:ext cx="10637215" cy="274320"/>
+          </a:xfrm>
+          <a:prstGeom prst="rect">
+            <a:avLst/>
+          </a:prstGeom>
+          <a:noFill/>
+        </p:spPr>
+        <p:txBody>
+          <a:bodyPr wrap="square" lIns="0" rIns="0" tIns="0" bIns="0">
+            <a:spAutoFit/>
+          </a:bodyPr>
+          <a:lstStyle/>
+          <a:p>
+            <a:pPr>
+              <a:lnSpc>
+                <a:spcPct val="102000"/>
+              </a:lnSpc>
+            </a:pPr>
+            <a:r>
+              <a:rPr sz="900" b="1">
+                <a:solidFill>
+                  <a:srgbClr val="141C1E"/>
+                </a:solidFill>
+                <a:latin typeface="Segoe UI"/>
+              </a:rPr>
+              <a:t>[33]  </a:t>
+            </a:r>
+            <a:r>
+              <a:rPr sz="900">
+                <a:solidFill>
+                  <a:srgbClr val="141C1E"/>
+                </a:solidFill>
+                <a:latin typeface="Segoe UI"/>
+              </a:rPr>
+              <a:t>H. Park, J. Noh, B. Ham, Learning memory-guided normality for anomaly detection, in: Proc. IEEE/CVF Conf. Comput. Vis. Pattern Recognit. (CVPR), 2020, pp. 14372–14381.</a:t>
+            </a:r>
+          </a:p>
+        </p:txBody>
+      </p:sp>
+      <p:sp>
+        <p:nvSpPr>
+          <p:cNvPr id="14" name="TextBox 13"/>
+          <p:cNvSpPr txBox="1"/>
+          <p:nvPr/>
+        </p:nvSpPr>
+        <p:spPr>
+          <a:xfrm>
+            <a:off x="777240" y="3899915"/>
+            <a:ext cx="10637215" cy="274320"/>
+          </a:xfrm>
+          <a:prstGeom prst="rect">
+            <a:avLst/>
+          </a:prstGeom>
+          <a:noFill/>
+        </p:spPr>
+        <p:txBody>
+          <a:bodyPr wrap="square" lIns="0" rIns="0" tIns="0" bIns="0">
+            <a:spAutoFit/>
+          </a:bodyPr>
+          <a:lstStyle/>
+          <a:p>
+            <a:pPr>
+              <a:lnSpc>
+                <a:spcPct val="102000"/>
+              </a:lnSpc>
+            </a:pPr>
+            <a:r>
+              <a:rPr sz="900" b="1">
+                <a:solidFill>
+                  <a:srgbClr val="141C1E"/>
+                </a:solidFill>
+                <a:latin typeface="Segoe UI"/>
+              </a:rPr>
+              <a:t>[34]  </a:t>
+            </a:r>
+            <a:r>
+              <a:rPr sz="900">
+                <a:solidFill>
+                  <a:srgbClr val="141C1E"/>
+                </a:solidFill>
+                <a:latin typeface="Segoe UI"/>
+              </a:rPr>
+              <a:t>Z. Liu, Y. Nie, C. Long, Q. Zhang, G. Li, A hybrid video anomaly detection framework via memory-augmented flow reconstruction and flow-guided frame prediction, in: Proc. IEEE/CVF Int. Conf. Comput. Vis. (ICCV), 2021, pp. 13588–13597.</a:t>
+            </a:r>
+          </a:p>
+        </p:txBody>
+      </p:sp>
+      <p:sp>
+        <p:nvSpPr>
+          <p:cNvPr id="15" name="TextBox 14"/>
+          <p:cNvSpPr txBox="1"/>
+          <p:nvPr/>
+        </p:nvSpPr>
+        <p:spPr>
+          <a:xfrm>
+            <a:off x="777240" y="4206240"/>
+            <a:ext cx="10637215" cy="274320"/>
+          </a:xfrm>
+          <a:prstGeom prst="rect">
+            <a:avLst/>
+          </a:prstGeom>
+          <a:noFill/>
+        </p:spPr>
+        <p:txBody>
+          <a:bodyPr wrap="square" lIns="0" rIns="0" tIns="0" bIns="0">
+            <a:spAutoFit/>
+          </a:bodyPr>
+          <a:lstStyle/>
+          <a:p>
+            <a:pPr>
+              <a:lnSpc>
+                <a:spcPct val="102000"/>
+              </a:lnSpc>
+            </a:pPr>
+            <a:r>
+              <a:rPr sz="900" b="1">
+                <a:solidFill>
+                  <a:srgbClr val="141C1E"/>
+                </a:solidFill>
+                <a:latin typeface="Segoe UI"/>
+              </a:rPr>
+              <a:t>[35]  </a:t>
+            </a:r>
+            <a:r>
+              <a:rPr sz="900">
+                <a:solidFill>
+                  <a:srgbClr val="141C1E"/>
+                </a:solidFill>
+                <a:latin typeface="Segoe UI"/>
+              </a:rPr>
+              <a:t>J. Micorek, H. Possegger, D. Narnhofer, H. Bischof, M. Kampel, MULDE: Multiscale log-density estimation via denoising score matching for video anomaly detection, in: Proc. IEEE/CVF Conf. Comput. Vis. Pattern Recognit. (CVPR), 2024, pp. 18868–18877.</a:t>
+            </a:r>
+          </a:p>
+        </p:txBody>
+      </p:sp>
+      <p:sp>
+        <p:nvSpPr>
+          <p:cNvPr id="16" name="TextBox 15"/>
+          <p:cNvSpPr txBox="1"/>
+          <p:nvPr/>
+        </p:nvSpPr>
+        <p:spPr>
+          <a:xfrm>
+            <a:off x="777240" y="4512564"/>
+            <a:ext cx="10637215" cy="274320"/>
+          </a:xfrm>
+          <a:prstGeom prst="rect">
+            <a:avLst/>
+          </a:prstGeom>
+          <a:noFill/>
+        </p:spPr>
+        <p:txBody>
+          <a:bodyPr wrap="square" lIns="0" rIns="0" tIns="0" bIns="0">
+            <a:spAutoFit/>
+          </a:bodyPr>
+          <a:lstStyle/>
+          <a:p>
+            <a:pPr>
+              <a:lnSpc>
+                <a:spcPct val="102000"/>
+              </a:lnSpc>
+            </a:pPr>
+            <a:r>
+              <a:rPr sz="900" b="1">
+                <a:solidFill>
+                  <a:srgbClr val="141C1E"/>
+                </a:solidFill>
+                <a:latin typeface="Segoe UI"/>
+              </a:rPr>
+              <a:t>[36]  </a:t>
+            </a:r>
+            <a:r>
+              <a:rPr sz="900">
+                <a:solidFill>
+                  <a:srgbClr val="141C1E"/>
+                </a:solidFill>
+                <a:latin typeface="Segoe UI"/>
+              </a:rPr>
+              <a:t>R. Girdhar, A. El-Nouby, Z. Liu, M. Singh, K. V. Alwala, A. Joulin, I. Misra, ImageBind: One embedding space to bind them all, in: Proc. IEEE/CVF Conf. Comput. Vis. Pattern Recognit. (CVPR), 2023, pp. 15180–15190.</a:t>
+            </a:r>
+          </a:p>
+        </p:txBody>
+      </p:sp>
+      <p:sp>
+        <p:nvSpPr>
+          <p:cNvPr id="17" name="TextBox 16"/>
+          <p:cNvSpPr txBox="1"/>
+          <p:nvPr/>
+        </p:nvSpPr>
+        <p:spPr>
+          <a:xfrm>
+            <a:off x="777240" y="4818888"/>
+            <a:ext cx="10637215" cy="274320"/>
+          </a:xfrm>
+          <a:prstGeom prst="rect">
+            <a:avLst/>
+          </a:prstGeom>
+          <a:noFill/>
+        </p:spPr>
+        <p:txBody>
+          <a:bodyPr wrap="square" lIns="0" rIns="0" tIns="0" bIns="0">
+            <a:spAutoFit/>
+          </a:bodyPr>
+          <a:lstStyle/>
+          <a:p>
+            <a:pPr>
+              <a:lnSpc>
+                <a:spcPct val="102000"/>
+              </a:lnSpc>
+            </a:pPr>
+            <a:r>
+              <a:rPr sz="900" b="1">
+                <a:solidFill>
+                  <a:srgbClr val="141C1E"/>
+                </a:solidFill>
+                <a:latin typeface="Segoe UI"/>
+              </a:rPr>
+              <a:t>[37]  </a:t>
+            </a:r>
+            <a:r>
+              <a:rPr sz="900">
+                <a:solidFill>
+                  <a:srgbClr val="141C1E"/>
+                </a:solidFill>
+                <a:latin typeface="Segoe UI"/>
+              </a:rPr>
+              <a:t>M. Maaz, H. Rasheed, S. Khan, F. Khan, Video-ChatGPT: Towards detailed video understanding via large vision and language models, in: Proc. 62nd Annu. Meet. Assoc. Comput. Linguist. (ACL), 2024, pp. 12585–12602.</a:t>
             </a:r>
           </a:p>
         </p:txBody>

--- a/docs/06_presentations/DA-ZVAD_Phase2_Review.pptx
+++ b/docs/06_presentations/DA-ZVAD_Phase2_Review.pptx
@@ -16998,7 +16998,7 @@
                           </a:solidFill>
                           <a:latin typeface="Segoe UI"/>
                         </a:rPr>
-                        <a:t>Zero-shot ImageBind [36]</a:t>
+                        <a:t>Zero-shot ImageBind [35]</a:t>
                       </a:r>
                     </a:p>
                   </a:txBody>
@@ -17140,7 +17140,7 @@
                           </a:solidFill>
                           <a:latin typeface="Segoe UI"/>
                         </a:rPr>
-                        <a:t>Video-ChatGPT [37]</a:t>
+                        <a:t>Video-ChatGPT [36]</a:t>
                       </a:r>
                     </a:p>
                   </a:txBody>
@@ -20620,7 +20620,7 @@
                 </a:solidFill>
                 <a:latin typeface="Segoe UI"/>
               </a:rPr>
-              <a:t>A. Radford, J. W. Kim, C. Hallacy, A. Ramesh, G. Goh, S. Agarwal, G. Sastry, A. Askell, P. Mishkin, J. Clark, G. Krueger, I. Sutskever, Learning transferable visual models from natural language supervision, in: Proc. Int. Conf. Mach. Learn. (ICML), 2021, pp. 8748–8763.</a:t>
+              <a:t>A. Radford, J. W. Kim, C. Hallacy, A. Ramesh, G. Goh, S. Agarwal, G. Sastry, A. Askell, P. Mishkin, J. Clark, G. Krueger, I. Sutskever, Learning transferable visual models from natural language supervision, in: Proceedings of the International Conference on Machine Learning (ICML), 2021, pp. 8748–8763.</a:t>
             </a:r>
           </a:p>
         </p:txBody>
@@ -20668,7 +20668,7 @@
                 </a:solidFill>
                 <a:latin typeface="Segoe UI"/>
               </a:rPr>
-              <a:t>J. Jeong, Y. Zou, T. Kim, D. Zhang, A. Ravichandran, O. Dabeer, WinCLIP: Zero-/few-shot anomaly classification and segmentation, in: Proc. IEEE/CVF Conf. Comput. Vis. Pattern Recognit. (CVPR), 2023, pp. 19606–19616.</a:t>
+              <a:t>J. Jeong, Y. Zou, T. Kim, D. Zhang, A. Ravichandran, O. Dabeer, WinCLIP: Zero-/few-shot anomaly classification and segmentation, in: Proceedings of the IEEE/CVF Conference on Computer Vision and Pattern Recognition (CVPR), 2023, pp. 19606–19616.</a:t>
             </a:r>
           </a:p>
         </p:txBody>
@@ -20716,7 +20716,7 @@
                 </a:solidFill>
                 <a:latin typeface="Segoe UI"/>
               </a:rPr>
-              <a:t>Q. Zhou, G. Pang, Y. Tian, S. He, J. Chen, AnomalyCLIP: Object-agnostic prompt learning for zero-shot anomaly detection, in: Proc. Int. Conf. Learn. Represent. (ICLR), 2024.</a:t>
+              <a:t>Q. Zhou, G. Pang, Y. Tian, S. He, J. Chen, AnomalyCLIP: Object-agnostic prompt learning for zero-shot anomaly detection, in: Proceedings of the International Conference on Learning Representations (ICLR), 2024.</a:t>
             </a:r>
           </a:p>
         </p:txBody>
@@ -20764,7 +20764,7 @@
                 </a:solidFill>
                 <a:latin typeface="Segoe UI"/>
               </a:rPr>
-              <a:t>P. Bergmann, M. Fauser, D. Sattlegger, C. Steger, MVTec AD — A comprehensive real-world dataset for unsupervised anomaly detection, in: Proc. IEEE/CVF Conf. Comput. Vis. Pattern Recognit. (CVPR), 2019, pp. 9592–9600.</a:t>
+              <a:t>P. Bergmann, M. Fauser, D. Sattlegger, C. Steger, MVTec AD — A comprehensive real-world dataset for unsupervised anomaly detection, in: Proceedings of the IEEE/CVF Conference on Computer Vision and Pattern Recognition (CVPR), 2019, pp. 9592–9600.</a:t>
             </a:r>
           </a:p>
         </p:txBody>
@@ -20812,7 +20812,7 @@
                 </a:solidFill>
                 <a:latin typeface="Segoe UI"/>
               </a:rPr>
-              <a:t>K. Roth, L. Pemula, J. Zepeda, B. Schölkopf, T. Brox, P. Gehler, Towards total recall in industrial anomaly detection, in: Proc. IEEE/CVF Conf. Comput. Vis. Pattern Recognit. (CVPR), 2022, pp. 14318–14328.</a:t>
+              <a:t>K. Roth, L. Pemula, J. Zepeda, B. Schölkopf, T. Brox, P. Gehler, Towards total recall in industrial anomaly detection, in: Proceedings of the IEEE/CVF Conference on Computer Vision and Pattern Recognition (CVPR), 2022, pp. 14318–14328.</a:t>
             </a:r>
           </a:p>
         </p:txBody>
@@ -20860,7 +20860,7 @@
                 </a:solidFill>
                 <a:latin typeface="Segoe UI"/>
               </a:rPr>
-              <a:t>L. Zanella, W. Menapace, M. Mancini, Y. Wang, E. Ricci, Harnessing large language models for training-free video anomaly detection, in: Proc. IEEE/CVF Conf. Comput. Vis. Pattern Recognit. (CVPR), 2024, pp. 18527–18536.</a:t>
+              <a:t>L. Zanella, W. Menapace, M. Mancini, Y. Wang, E. Ricci, Harnessing large language models for training-free video anomaly detection, in: Proceedings of the IEEE/CVF Conference on Computer Vision and Pattern Recognition (CVPR), 2024, pp. 18527–18536.</a:t>
             </a:r>
           </a:p>
         </p:txBody>
@@ -20908,7 +20908,7 @@
                 </a:solidFill>
                 <a:latin typeface="Segoe UI"/>
               </a:rPr>
-              <a:t>M. Ye, W. Liu, P. He, VERA: Explainable video anomaly detection via verbalized learning of vision-language models, in: Proc. IEEE/CVF Conf. Comput. Vis. Pattern Recognit. (CVPR), 2025. ArXiv:2412.01095.</a:t>
+              <a:t>M. Ye, W. Liu, P. He, VERA: Explainable video anomaly detection via verbalized learning of vision-language models, in: Proceedings of the IEEE/CVF Conference on Computer Vision and Pattern Recognition (CVPR), 2025. ArXiv:2412.01095.</a:t>
             </a:r>
           </a:p>
         </p:txBody>
@@ -20956,7 +20956,7 @@
                 </a:solidFill>
                 <a:latin typeface="Segoe UI"/>
               </a:rPr>
-              <a:t>S. Ahn, Y. Jo, K. Lee, S. Kwon, I. Hong, S. Park, AnyAnomaly: Zero-shot customizable video anomaly detection with LVLM, in: Proc. IEEE/CVF Winter Conf. Appl. Comput. Vis. (WACV), 2026, pp. 3026–3035.</a:t>
+              <a:t>S. Ahn, Y. Jo, K. Lee, S. Kwon, I. Hong, S. Park, AnyAnomaly: Zero-shot customizable video anomaly detection with LVLM, in: Proceedings of the IEEE/CVF Winter Conference on Applications of Computer Vision (WACV), 2026, pp. 3026–3035.</a:t>
             </a:r>
           </a:p>
         </p:txBody>
@@ -21004,7 +21004,7 @@
                 </a:solidFill>
                 <a:latin typeface="Segoe UI"/>
               </a:rPr>
-              <a:t>P. Wu, X. Zhou, G. Pang, Y. Sun, J. Liu, P. Wang, Y. Zhang, Open-vocabulary video anomaly detection, in: Proc. IEEE/CVF Conf. Comput. Vis. Pattern Recognit. (CVPR), 2024, pp. 18297–18307.</a:t>
+              <a:t>P. Wu, X. Zhou, G. Pang, Y. Sun, J. Liu, P. Wang, Y. Zhang, Open-vocabulary video anomaly detection, in: Proceedings of the IEEE/CVF Conference on Computer Vision and Pattern Recognition (CVPR), 2024, pp. 18297–18307.</a:t>
             </a:r>
           </a:p>
         </p:txBody>
@@ -21052,7 +21052,7 @@
                 </a:solidFill>
                 <a:latin typeface="Segoe UI"/>
               </a:rPr>
-              <a:t>V. M. Patel, R. Gopalan, R. Li, R. Chellappa, Visual domain adaptation: A survey of recent advances, IEEE Signal Process. Mag. 32 (2015) 53–69.</a:t>
+              <a:t>V. M. Patel, R. Gopalan, R. Li, R. Chellappa, Visual domain adaptation: A survey of recent advances, IEEE Signal Processing Magazine 32 (2015) 53–69.</a:t>
             </a:r>
           </a:p>
         </p:txBody>
@@ -21148,7 +21148,7 @@
                 </a:solidFill>
                 <a:latin typeface="Segoe UI"/>
               </a:rPr>
-              <a:t>G. Wilson, D. J. Cook, A survey of unsupervised deep domain adaptation, ACM Comput. Surv. 51 (2020) 1–46.</a:t>
+              <a:t>G. Wilson, D. J. Cook, A survey of unsupervised deep domain adaptation, ACM Computing Surveys 51 (2020) 1–46.</a:t>
             </a:r>
           </a:p>
         </p:txBody>
@@ -21419,7 +21419,7 @@
                 </a:solidFill>
                 <a:latin typeface="Segoe UI"/>
               </a:rPr>
-              <a:t>X. Liu, C. Yoo, F. Xing, H. Oh, G. El Fakhri, J.-W. Kang, J. Woo, Deep unsupervised domain adaptation: A review of recent advances and perspectives, APSIPA Trans. Signal Inf. Process. 11 (2022). ArXiv:2208.07422.</a:t>
+              <a:t>X. Liu, C. Yoo, F. Xing, H. Oh, G. El Fakhri, J.-W. Kang, J. Woo, Deep unsupervised domain adaptation: A review of recent advances and perspectives, APSIPA Transactions on Signal and Information Processing 11 (2022). ArXiv:2208.07422.</a:t>
             </a:r>
           </a:p>
         </p:txBody>
@@ -21515,7 +21515,7 @@
                 </a:solidFill>
                 <a:latin typeface="Segoe UI"/>
               </a:rPr>
-              <a:t>L. Fan, F. Liu, C. Chen, Domain adaptation of large language models for geotechnical applications, Solid Earth Sci. (2026). Art. no. 100285.</a:t>
+              <a:t>L. Fan, F. Liu, C. Chen, Domain adaptation of large language models for geotechnical applications, Solid Earth Sciences (2026). Art. no. 100285.</a:t>
             </a:r>
           </a:p>
         </p:txBody>
@@ -21563,7 +21563,7 @@
                 </a:solidFill>
                 <a:latin typeface="Segoe UI"/>
               </a:rPr>
-              <a:t>D. Guo, Y. Fu, S. Li, Ada-VAD: Domain adaptable video anomaly detection, in: Proc. SIAM Int. Conf. Data Min. (SDM), 2024, pp. 634–642.</a:t>
+              <a:t>D. Guo, Y. Fu, S. Li, Ada-VAD: Domain adaptable video anomaly detection, in: Proceedings of the SIAM International Conference on Data Mining (SDM), 2024, pp. 634–642.</a:t>
             </a:r>
           </a:p>
         </p:txBody>
@@ -21611,7 +21611,7 @@
                 </a:solidFill>
                 <a:latin typeface="Segoe UI"/>
               </a:rPr>
-              <a:t>Y. Lu, F. Yu, M. K. K. Reddy, Y. Wang, Few-shot scene-adaptive anomaly detection, in: Proc. Eur. Conf. Comput. Vis. (ECCV), 2020, pp. 125–141.</a:t>
+              <a:t>Y. Lu, F. Yu, M. K. K. Reddy, Y. Wang, Few-shot scene-adaptive anomaly detection, in: Proceedings of the European Conference on Computer Vision (ECCV), 2020, pp. 125–141.</a:t>
             </a:r>
           </a:p>
         </p:txBody>
@@ -21659,7 +21659,7 @@
                 </a:solidFill>
                 <a:latin typeface="Segoe UI"/>
               </a:rPr>
-              <a:t>A. Aich, K.-C. Peng, A. K. Roy-Chowdhury, Cross-domain video anomaly detection without target domain adaptation, in: Proc. IEEE/CVF Winter Conf. Appl. Comput. Vis. (WACV), 2023, pp. 2578–2590.</a:t>
+              <a:t>A. Aich, K.-C. Peng, A. K. Roy-Chowdhury, Cross-domain video anomaly detection without target domain adaptation, in: Proceedings of the IEEE/CVF Winter Conference on Applications of Computer Vision (WACV), 2023, pp. 2578–2590.</a:t>
             </a:r>
           </a:p>
         </p:txBody>
@@ -21755,7 +21755,7 @@
                 </a:solidFill>
                 <a:latin typeface="Segoe UI"/>
               </a:rPr>
-              <a:t>W. Liu, W. Luo, D. Lian, S. Gao, Future frame prediction for anomaly detection — A new baseline, in: Proc. IEEE/CVF Conf. Comput. Vis. Pattern Recognit. (CVPR), 2018, pp. 6536–6545.</a:t>
+              <a:t>W. Liu, W. Luo, D. Lian, S. Gao, Future frame prediction for anomaly detection — A new baseline, in: Proceedings of the IEEE/CVF Conference on Computer Vision and Pattern Recognition (CVPR), 2018, pp. 6536–6545.</a:t>
             </a:r>
           </a:p>
         </p:txBody>
@@ -21803,7 +21803,7 @@
                 </a:solidFill>
                 <a:latin typeface="Segoe UI"/>
               </a:rPr>
-              <a:t>A. Dosovitskiy, L. Beyer, A. Kolesnikov, D. Weissenborn, X. Zhai, T. Unterthiner, M. Dehghani, M. Minderer, G. Heigold, S. Gelly, J. Uszkoreit, N. Houlsby, An image is worth 16x16 words: Transformers for image recognition at scale, in: Proc. Int. Conf. Learn. Represent. (ICLR), 2021.</a:t>
+              <a:t>A. Dosovitskiy, L. Beyer, A. Kolesnikov, D. Weissenborn, X. Zhai, T. Unterthiner, M. Dehghani, M. Minderer, G. Heigold, S. Gelly, J. Uszkoreit, N. Houlsby, An image is worth 16x16 words: Transformers for image recognition at scale, in: Proceedings of the International Conference on Learning Representations (ICLR), 2021.</a:t>
             </a:r>
           </a:p>
         </p:txBody>
@@ -21851,7 +21851,7 @@
                 </a:solidFill>
                 <a:latin typeface="Segoe UI"/>
               </a:rPr>
-              <a:t>A. Vaswani, N. Shazeer, N. Parmar, J. Uszkoreit, L. Jones, A. N. Gomez, L. Kaiser, I. Polosukhin, Attention is all you need, in: Adv. Neural Inf. Process. Syst. (NeurIPS), 2017, pp. 5998–6008.</a:t>
+              <a:t>A. Vaswani, N. Shazeer, N. Parmar, J. Uszkoreit, L. Jones, A. N. Gomez, L. Kaiser, I. Polosukhin, Attention is all you need, in: Advances in Neural Information Processing Systems (NeurIPS), 2017, pp. 5998–6008.</a:t>
             </a:r>
           </a:p>
         </p:txBody>
@@ -21899,7 +21899,7 @@
                 </a:solidFill>
                 <a:latin typeface="Segoe UI"/>
               </a:rPr>
-              <a:t>H. Liu, C. Li, Q. Wu, Y. J. Lee, Visual instruction tuning, in: Adv. Neural Inf. Process. Syst. (NeurIPS), 2023, pp. 34892–34916.</a:t>
+              <a:t>H. Liu, C. Li, Q. Wu, Y. J. Lee, Visual instruction tuning, in: Advances in Neural Information Processing Systems (NeurIPS), 2023, pp. 34892–34916.</a:t>
             </a:r>
           </a:p>
         </p:txBody>
@@ -21947,7 +21947,7 @@
                 </a:solidFill>
                 <a:latin typeface="Segoe UI"/>
               </a:rPr>
-              <a:t>T. Dettmers, A. Pagnoni, A. Holtzman, L. Zettlemoyer, QLoRA: Efficient finetuning of quantized LLMs, in: Adv. Neural Inf. Process. Syst. (NeurIPS), 2023, pp. 10088–10115.</a:t>
+              <a:t>T. Dettmers, A. Pagnoni, A. Holtzman, L. Zettlemoyer, QLoRA: Efficient finetuning of quantized LLMs, in: Advances in Neural Information Processing Systems (NeurIPS), 2023, pp. 10088–10115.</a:t>
             </a:r>
           </a:p>
         </p:txBody>
@@ -21995,7 +21995,7 @@
                 </a:solidFill>
                 <a:latin typeface="Segoe UI"/>
               </a:rPr>
-              <a:t>C. Lu, J. Shi, J. Jia, Abnormal event detection at 150 FPS in MATLAB, in: Proc. IEEE Int. Conf. Comput. Vis. (ICCV), 2013, pp. 2720–2727.</a:t>
+              <a:t>C. Lu, J. Shi, J. Jia, Abnormal event detection at 150 FPS in MATLAB, in: Proceedings of the IEEE International Conference on Computer Vision (ICCV), 2013, pp. 2720–2727.</a:t>
             </a:r>
           </a:p>
         </p:txBody>
@@ -22973,7 +22973,7 @@
                 </a:solidFill>
                 <a:latin typeface="Segoe UI"/>
               </a:rPr>
-              <a:t>T. Fawcett, An introduction to ROC analysis, Pattern Recognit. Lett. 27 (2006) 861–874.</a:t>
+              <a:t>T. Fawcett, An introduction to ROC analysis, Pattern Recognition Letters 27 (2006) 861–874.</a:t>
             </a:r>
           </a:p>
         </p:txBody>
@@ -23021,7 +23021,7 @@
                 </a:solidFill>
                 <a:latin typeface="Segoe UI"/>
               </a:rPr>
-              <a:t>A. P. Bradley, The use of the area under the ROC curve in the evaluation of machine learning algorithms, Pattern Recognit. 30 (1997) 1145–1159.</a:t>
+              <a:t>A. P. Bradley, The use of the area under the ROC curve in the evaluation of machine learning algorithms, Pattern Recognition 30 (1997) 1145–1159.</a:t>
             </a:r>
           </a:p>
         </p:txBody>
@@ -23069,7 +23069,7 @@
                 </a:solidFill>
                 <a:latin typeface="Segoe UI"/>
               </a:rPr>
-              <a:t>J. Davis, M. Goadrich, The relationship between precision-recall and ROC curves, in: Proc. Int. Conf. Mach. Learn. (ICML), 2006, pp. 233–240.</a:t>
+              <a:t>J. Davis, M. Goadrich, The relationship between precision-recall and ROC curves, in: Proceedings of the International Conference on Machine Learning (ICML), 2006, pp. 233–240.</a:t>
             </a:r>
           </a:p>
         </p:txBody>
@@ -23117,7 +23117,7 @@
                 </a:solidFill>
                 <a:latin typeface="Segoe UI"/>
               </a:rPr>
-              <a:t>B. Schölkopf, J. C. Platt, J. Shawe-Taylor, A. J. Smola, R. C. Williamson, Estimating the support of a high-dimensional distribution, Neural Comput. 13 (2001) 1443–1471.</a:t>
+              <a:t>B. Schölkopf, J. C. Platt, J. Shawe-Taylor, A. J. Smola, R. C. Williamson, Estimating the support of a high-dimensional distribution, Neural Computation 13 (2001) 1443–1471.</a:t>
             </a:r>
           </a:p>
         </p:txBody>
@@ -23165,7 +23165,7 @@
                 </a:solidFill>
                 <a:latin typeface="Segoe UI"/>
               </a:rPr>
-              <a:t>Y. Tian, G. Pang, Y. Chen, R. Singh, J. W. Verjans, G. Carneiro, Weakly-supervised video anomaly detection with robust temporal feature magnitude learning, in: Proc. IEEE/CVF Int. Conf. Comput. Vis. (ICCV), 2021, pp. 4975–4986.</a:t>
+              <a:t>H. Lv, C. Chen, Z. Cui, C. Xu, Y. Li, J. Yang, Learning normal dynamics in videos with meta prototype network, in: Proceedings of the IEEE/CVF Conference on Computer Vision and Pattern Recognition (CVPR), 2021, pp. 15425–15434.</a:t>
             </a:r>
           </a:p>
         </p:txBody>
@@ -23213,7 +23213,7 @@
                 </a:solidFill>
                 <a:latin typeface="Segoe UI"/>
               </a:rPr>
-              <a:t>D. Gong, L. Liu, V. Le, B. Saha, M. R. Mansour, S. Venkatesh, A. van den Hengel, Memorizing normality to detect anomaly: Memory-augmented deep autoencoder for unsupervised anomaly detection, in: Proc. IEEE/CVF Int. Conf. Comput. Vis. (ICCV), 2019, pp. 1705–1714.</a:t>
+              <a:t>C. Yan, S. Zhang, Y. Liu, G. Pang, W. Wang, Feature prediction diffusion model for video anomaly detection, in: Proceedings of the IEEE/CVF International Conference on Computer Vision (ICCV), 2023, pp. 5527–5537.</a:t>
             </a:r>
           </a:p>
         </p:txBody>
@@ -23261,7 +23261,7 @@
                 </a:solidFill>
                 <a:latin typeface="Segoe UI"/>
               </a:rPr>
-              <a:t>H. Park, J. Noh, B. Ham, Learning memory-guided normality for anomaly detection, in: Proc. IEEE/CVF Conf. Comput. Vis. Pattern Recognit. (CVPR), 2020, pp. 14372–14381.</a:t>
+              <a:t>H. Zhou, J. Cai, Y. Ye, Y. Feng, C. Gao, J. Yu, Z. Song, W. Yang, Video anomaly detection with motion and appearance guided patch diffusion model, arXiv preprint arXiv:2412.09026 (2024).</a:t>
             </a:r>
           </a:p>
         </p:txBody>
@@ -23309,7 +23309,7 @@
                 </a:solidFill>
                 <a:latin typeface="Segoe UI"/>
               </a:rPr>
-              <a:t>Z. Liu, Y. Nie, C. Long, Q. Zhang, G. Li, A hybrid video anomaly detection framework via memory-augmented flow reconstruction and flow-guided frame prediction, in: Proc. IEEE/CVF Int. Conf. Comput. Vis. (ICCV), 2021, pp. 13588–13597.</a:t>
+              <a:t>J. Micorek, H. Possegger, D. Narnhofer, H. Bischof, M. Kampel, MULDE: Multiscale log-density estimation via denoising score matching for video anomaly detection, in: Proceedings of the IEEE/CVF Conference on Computer Vision and Pattern Recognition (CVPR), 2024, pp. 18868–18877.</a:t>
             </a:r>
           </a:p>
         </p:txBody>
@@ -23357,7 +23357,7 @@
                 </a:solidFill>
                 <a:latin typeface="Segoe UI"/>
               </a:rPr>
-              <a:t>J. Micorek, H. Possegger, D. Narnhofer, H. Bischof, M. Kampel, MULDE: Multiscale log-density estimation via denoising score matching for video anomaly detection, in: Proc. IEEE/CVF Conf. Comput. Vis. Pattern Recognit. (CVPR), 2024, pp. 18868–18877.</a:t>
+              <a:t>R. Girdhar, A. El-Nouby, Z. Liu, M. Singh, K. V. Alwala, A. Joulin, I. Misra, ImageBind: One embedding space to bind them all, in: Proceedings of the IEEE/CVF Conference on Computer Vision and Pattern Recognition (CVPR), 2023, pp. 15180–15190.</a:t>
             </a:r>
           </a:p>
         </p:txBody>
@@ -23405,55 +23405,7 @@
                 </a:solidFill>
                 <a:latin typeface="Segoe UI"/>
               </a:rPr>
-              <a:t>R. Girdhar, A. El-Nouby, Z. Liu, M. Singh, K. V. Alwala, A. Joulin, I. Misra, ImageBind: One embedding space to bind them all, in: Proc. IEEE/CVF Conf. Comput. Vis. Pattern Recognit. (CVPR), 2023, pp. 15180–15190.</a:t>
-            </a:r>
-          </a:p>
-        </p:txBody>
-      </p:sp>
-      <p:sp>
-        <p:nvSpPr>
-          <p:cNvPr id="17" name="TextBox 16"/>
-          <p:cNvSpPr txBox="1"/>
-          <p:nvPr/>
-        </p:nvSpPr>
-        <p:spPr>
-          <a:xfrm>
-            <a:off x="777240" y="4818888"/>
-            <a:ext cx="10637215" cy="274320"/>
-          </a:xfrm>
-          <a:prstGeom prst="rect">
-            <a:avLst/>
-          </a:prstGeom>
-          <a:noFill/>
-        </p:spPr>
-        <p:txBody>
-          <a:bodyPr wrap="square" lIns="0" rIns="0" tIns="0" bIns="0">
-            <a:spAutoFit/>
-          </a:bodyPr>
-          <a:lstStyle/>
-          <a:p>
-            <a:pPr>
-              <a:lnSpc>
-                <a:spcPct val="102000"/>
-              </a:lnSpc>
-            </a:pPr>
-            <a:r>
-              <a:rPr sz="900" b="1">
-                <a:solidFill>
-                  <a:srgbClr val="141C1E"/>
-                </a:solidFill>
-                <a:latin typeface="Segoe UI"/>
-              </a:rPr>
-              <a:t>[37]  </a:t>
-            </a:r>
-            <a:r>
-              <a:rPr sz="900">
-                <a:solidFill>
-                  <a:srgbClr val="141C1E"/>
-                </a:solidFill>
-                <a:latin typeface="Segoe UI"/>
-              </a:rPr>
-              <a:t>M. Maaz, H. Rasheed, S. Khan, F. Khan, Video-ChatGPT: Towards detailed video understanding via large vision and language models, in: Proc. 62nd Annu. Meet. Assoc. Comput. Linguist. (ACL), 2024, pp. 12585–12602.</a:t>
+              <a:t>M. Maaz, H. Rasheed, S. Khan, F. Khan, Video-ChatGPT: Towards detailed video understanding via large vision and language models, in: Proceedings of the 62nd Annual Meeting of the Association for Computational Linguistics (ACL), 2024, pp. 12585–12602.</a:t>
             </a:r>
           </a:p>
         </p:txBody>
